--- a/DCSP_FINAL_0610/ppt/DCSP_LAB3_ppt.pptx
+++ b/DCSP_FINAL_0610/ppt/DCSP_LAB3_ppt.pptx
@@ -8,11 +8,11 @@
     <p:sldId id="256" r:id="rId2"/>
     <p:sldId id="257" r:id="rId3"/>
     <p:sldId id="259" r:id="rId4"/>
-    <p:sldId id="265" r:id="rId5"/>
-    <p:sldId id="260" r:id="rId6"/>
-    <p:sldId id="261" r:id="rId7"/>
-    <p:sldId id="264" r:id="rId8"/>
-    <p:sldId id="263" r:id="rId9"/>
+    <p:sldId id="267" r:id="rId5"/>
+    <p:sldId id="268" r:id="rId6"/>
+    <p:sldId id="269" r:id="rId7"/>
+    <p:sldId id="270" r:id="rId8"/>
+    <p:sldId id="271" r:id="rId9"/>
   </p:sldIdLst>
   <p:sldSz cx="12192000" cy="6858000"/>
   <p:notesSz cx="6858000" cy="9144000"/>
@@ -266,7 +266,7 @@
           <a:p>
             <a:fld id="{28F75D9E-C40D-4D28-B16B-EB443FB349EC}" type="datetimeFigureOut">
               <a:rPr lang="ko-KR" altLang="en-US" smtClean="0"/>
-              <a:t>2026-05-13</a:t>
+              <a:t>2026-06-22</a:t>
             </a:fld>
             <a:endParaRPr lang="ko-KR" altLang="en-US"/>
           </a:p>
@@ -464,7 +464,7 @@
           <a:p>
             <a:fld id="{28F75D9E-C40D-4D28-B16B-EB443FB349EC}" type="datetimeFigureOut">
               <a:rPr lang="ko-KR" altLang="en-US" smtClean="0"/>
-              <a:t>2026-05-13</a:t>
+              <a:t>2026-06-22</a:t>
             </a:fld>
             <a:endParaRPr lang="ko-KR" altLang="en-US"/>
           </a:p>
@@ -672,7 +672,7 @@
           <a:p>
             <a:fld id="{28F75D9E-C40D-4D28-B16B-EB443FB349EC}" type="datetimeFigureOut">
               <a:rPr lang="ko-KR" altLang="en-US" smtClean="0"/>
-              <a:t>2026-05-13</a:t>
+              <a:t>2026-06-22</a:t>
             </a:fld>
             <a:endParaRPr lang="ko-KR" altLang="en-US"/>
           </a:p>
@@ -870,7 +870,7 @@
           <a:p>
             <a:fld id="{28F75D9E-C40D-4D28-B16B-EB443FB349EC}" type="datetimeFigureOut">
               <a:rPr lang="ko-KR" altLang="en-US" smtClean="0"/>
-              <a:t>2026-05-13</a:t>
+              <a:t>2026-06-22</a:t>
             </a:fld>
             <a:endParaRPr lang="ko-KR" altLang="en-US"/>
           </a:p>
@@ -1145,7 +1145,7 @@
           <a:p>
             <a:fld id="{28F75D9E-C40D-4D28-B16B-EB443FB349EC}" type="datetimeFigureOut">
               <a:rPr lang="ko-KR" altLang="en-US" smtClean="0"/>
-              <a:t>2026-05-13</a:t>
+              <a:t>2026-06-22</a:t>
             </a:fld>
             <a:endParaRPr lang="ko-KR" altLang="en-US"/>
           </a:p>
@@ -1410,7 +1410,7 @@
           <a:p>
             <a:fld id="{28F75D9E-C40D-4D28-B16B-EB443FB349EC}" type="datetimeFigureOut">
               <a:rPr lang="ko-KR" altLang="en-US" smtClean="0"/>
-              <a:t>2026-05-13</a:t>
+              <a:t>2026-06-22</a:t>
             </a:fld>
             <a:endParaRPr lang="ko-KR" altLang="en-US"/>
           </a:p>
@@ -1822,7 +1822,7 @@
           <a:p>
             <a:fld id="{28F75D9E-C40D-4D28-B16B-EB443FB349EC}" type="datetimeFigureOut">
               <a:rPr lang="ko-KR" altLang="en-US" smtClean="0"/>
-              <a:t>2026-05-13</a:t>
+              <a:t>2026-06-22</a:t>
             </a:fld>
             <a:endParaRPr lang="ko-KR" altLang="en-US"/>
           </a:p>
@@ -1963,7 +1963,7 @@
           <a:p>
             <a:fld id="{28F75D9E-C40D-4D28-B16B-EB443FB349EC}" type="datetimeFigureOut">
               <a:rPr lang="ko-KR" altLang="en-US" smtClean="0"/>
-              <a:t>2026-05-13</a:t>
+              <a:t>2026-06-22</a:t>
             </a:fld>
             <a:endParaRPr lang="ko-KR" altLang="en-US"/>
           </a:p>
@@ -2076,7 +2076,7 @@
           <a:p>
             <a:fld id="{28F75D9E-C40D-4D28-B16B-EB443FB349EC}" type="datetimeFigureOut">
               <a:rPr lang="ko-KR" altLang="en-US" smtClean="0"/>
-              <a:t>2026-05-13</a:t>
+              <a:t>2026-06-22</a:t>
             </a:fld>
             <a:endParaRPr lang="ko-KR" altLang="en-US"/>
           </a:p>
@@ -2387,7 +2387,7 @@
           <a:p>
             <a:fld id="{28F75D9E-C40D-4D28-B16B-EB443FB349EC}" type="datetimeFigureOut">
               <a:rPr lang="ko-KR" altLang="en-US" smtClean="0"/>
-              <a:t>2026-05-13</a:t>
+              <a:t>2026-06-22</a:t>
             </a:fld>
             <a:endParaRPr lang="ko-KR" altLang="en-US"/>
           </a:p>
@@ -2675,7 +2675,7 @@
           <a:p>
             <a:fld id="{28F75D9E-C40D-4D28-B16B-EB443FB349EC}" type="datetimeFigureOut">
               <a:rPr lang="ko-KR" altLang="en-US" smtClean="0"/>
-              <a:t>2026-05-13</a:t>
+              <a:t>2026-06-22</a:t>
             </a:fld>
             <a:endParaRPr lang="ko-KR" altLang="en-US"/>
           </a:p>
@@ -2916,7 +2916,7 @@
           <a:p>
             <a:fld id="{28F75D9E-C40D-4D28-B16B-EB443FB349EC}" type="datetimeFigureOut">
               <a:rPr lang="ko-KR" altLang="en-US" smtClean="0"/>
-              <a:t>2026-05-13</a:t>
+              <a:t>2026-06-22</a:t>
             </a:fld>
             <a:endParaRPr lang="ko-KR" altLang="en-US"/>
           </a:p>
@@ -3529,7 +3529,7 @@
           <a:p>
             <a:r>
               <a:rPr lang="en-US" altLang="ko-KR" b="1" dirty="0"/>
-              <a:t>1. Goal of the Experiment</a:t>
+              <a:t>Contents</a:t>
             </a:r>
             <a:br>
               <a:rPr lang="ko-KR" altLang="ko-KR" b="1" dirty="0"/>
@@ -3570,7 +3570,7 @@
             </a:pPr>
             <a:r>
               <a:rPr lang="en-US" altLang="ko-KR" b="1" dirty="0"/>
-              <a:t>Obtain Motor Static Property</a:t>
+              <a:t>Motor Linearization</a:t>
             </a:r>
             <a:endParaRPr lang="ko-KR" altLang="ko-KR" b="1" dirty="0"/>
           </a:p>
@@ -3581,7 +3581,7 @@
             </a:pPr>
             <a:r>
               <a:rPr lang="en-US" altLang="ko-KR" b="1" dirty="0"/>
-              <a:t>Motor Static Property vs Linearized Model</a:t>
+              <a:t>Motor Modeling</a:t>
             </a:r>
             <a:endParaRPr lang="ko-KR" altLang="ko-KR" b="1" dirty="0"/>
           </a:p>
@@ -3592,7 +3592,7 @@
             </a:pPr>
             <a:r>
               <a:rPr lang="en-US" altLang="ko-KR" b="1" dirty="0"/>
-              <a:t>Linear Mapping</a:t>
+              <a:t>Designation</a:t>
             </a:r>
           </a:p>
           <a:p>
@@ -3602,32 +3602,13 @@
             </a:pPr>
             <a:r>
               <a:rPr lang="en-US" altLang="ko-KR" b="1" dirty="0"/>
-              <a:t>Linearization Validation</a:t>
-            </a:r>
-          </a:p>
-          <a:p>
-            <a:pPr marL="514350" indent="-514350">
-              <a:buFont typeface="+mj-lt"/>
-              <a:buAutoNum type="arabicParenR"/>
+              <a:t>Stabilization</a:t>
+            </a:r>
+          </a:p>
+          <a:p>
+            <a:pPr marL="0" indent="0">
+              <a:buNone/>
             </a:pPr>
-            <a:r>
-              <a:rPr lang="en-US" altLang="ko-KR" b="1" dirty="0"/>
-              <a:t>Check Slew Rate Limit</a:t>
-            </a:r>
-            <a:endParaRPr lang="ko-KR" altLang="ko-KR" b="1" dirty="0"/>
-          </a:p>
-          <a:p>
-            <a:pPr marL="514350" indent="-514350">
-              <a:buFont typeface="+mj-lt"/>
-              <a:buAutoNum type="arabicParenR"/>
-            </a:pPr>
-            <a:r>
-              <a:rPr lang="en-US" altLang="ko-KR" b="1" dirty="0"/>
-              <a:t>Sine Response - Bode Magnitude plot</a:t>
-            </a:r>
-            <a:endParaRPr lang="ko-KR" altLang="ko-KR" b="1" dirty="0"/>
-          </a:p>
-          <a:p>
             <a:endParaRPr lang="ko-KR" altLang="en-US" dirty="0"/>
           </a:p>
         </p:txBody>
@@ -3752,123 +3733,17 @@
         </p:spPr>
         <p:txBody>
           <a:bodyPr>
-            <a:normAutofit fontScale="90000"/>
+            <a:normAutofit/>
           </a:bodyPr>
           <a:lstStyle/>
           <a:p>
             <a:r>
               <a:rPr lang="en-US" altLang="ko-KR" b="1" dirty="0"/>
-              <a:t>3. Motor Static Property vs Linearized Model</a:t>
+              <a:t>1. Motor Linearization</a:t>
             </a:r>
             <a:br>
               <a:rPr lang="ko-KR" altLang="ko-KR" b="1" dirty="0"/>
             </a:br>
-            <a:endParaRPr lang="ko-KR" altLang="en-US" dirty="0"/>
-          </a:p>
-        </p:txBody>
-      </p:sp>
-      <p:sp>
-        <p:nvSpPr>
-          <p:cNvPr id="4" name="내용 개체 틀 3">
-            <a:extLst>
-              <a:ext uri="{FF2B5EF4-FFF2-40B4-BE49-F238E27FC236}">
-                <a16:creationId xmlns:a16="http://schemas.microsoft.com/office/drawing/2014/main" id="{F0865E51-2B55-F27A-2410-216DF4AA86DE}"/>
-              </a:ext>
-            </a:extLst>
-          </p:cNvPr>
-          <p:cNvSpPr>
-            <a:spLocks noGrp="1"/>
-          </p:cNvSpPr>
-          <p:nvPr>
-            <p:ph idx="1"/>
-          </p:nvPr>
-        </p:nvSpPr>
-        <p:spPr>
-          <a:xfrm>
-            <a:off x="444500" y="1253331"/>
-            <a:ext cx="6211242" cy="4351338"/>
-          </a:xfrm>
-        </p:spPr>
-        <p:txBody>
-          <a:bodyPr>
-            <a:normAutofit/>
-          </a:bodyPr>
-          <a:lstStyle/>
-          <a:p>
-            <a:pPr marL="514350" indent="-514350" algn="just">
-              <a:buFont typeface="+mj-lt"/>
-              <a:buAutoNum type="arabicParenR"/>
-            </a:pPr>
-            <a:r>
-              <a:rPr lang="en-US" altLang="ko-KR" b="1" dirty="0">
-                <a:solidFill>
-                  <a:schemeClr val="tx2">
-                    <a:lumMod val="90000"/>
-                    <a:lumOff val="10000"/>
-                  </a:schemeClr>
-                </a:solidFill>
-              </a:rPr>
-              <a:t>3-Point Mapping</a:t>
-            </a:r>
-            <a:r>
-              <a:rPr lang="en-US" altLang="ko-KR" b="1" dirty="0">
-                <a:solidFill>
-                  <a:schemeClr val="accent1">
-                    <a:lumMod val="50000"/>
-                  </a:schemeClr>
-                </a:solidFill>
-              </a:rPr>
-              <a:t>: </a:t>
-            </a:r>
-          </a:p>
-          <a:p>
-            <a:pPr marL="0" indent="0">
-              <a:buNone/>
-            </a:pPr>
-            <a:r>
-              <a:rPr lang="en-US" altLang="ko-KR" dirty="0"/>
-              <a:t>Quadratic Linearization through selecting 3 exclusive points. </a:t>
-            </a:r>
-          </a:p>
-          <a:p>
-            <a:pPr marL="514350" indent="-514350">
-              <a:buFont typeface="+mj-lt"/>
-              <a:buAutoNum type="arabicParenR"/>
-            </a:pPr>
-            <a:endParaRPr lang="en-US" altLang="ko-KR" dirty="0"/>
-          </a:p>
-          <a:p>
-            <a:pPr marL="0" indent="0">
-              <a:buNone/>
-            </a:pPr>
-            <a:r>
-              <a:rPr lang="en-US" altLang="ko-KR" b="1" dirty="0">
-                <a:solidFill>
-                  <a:schemeClr val="tx2">
-                    <a:lumMod val="90000"/>
-                    <a:lumOff val="10000"/>
-                  </a:schemeClr>
-                </a:solidFill>
-              </a:rPr>
-              <a:t>2) Accuracy &amp; Deviations:</a:t>
-            </a:r>
-          </a:p>
-          <a:p>
-            <a:pPr marL="0" indent="0">
-              <a:buNone/>
-            </a:pPr>
-            <a:r>
-              <a:rPr lang="en-US" altLang="ko-KR" dirty="0"/>
-              <a:t>The goal is to accurately trace the 3 points, especially near the </a:t>
-            </a:r>
-            <a:r>
-              <a:rPr lang="en-US" altLang="ko-KR" dirty="0" err="1"/>
-              <a:t>deadzone</a:t>
-            </a:r>
-            <a:r>
-              <a:rPr lang="en-US" altLang="ko-KR" dirty="0"/>
-              <a:t> region. Though, minor errors do exist in the remaining region. </a:t>
-            </a:r>
             <a:endParaRPr lang="ko-KR" altLang="en-US" dirty="0"/>
           </a:p>
         </p:txBody>
@@ -3935,10 +3810,10 @@
       </p:sp>
       <p:pic>
         <p:nvPicPr>
-          <p:cNvPr id="7" name="그림 6">
-            <a:extLst>
-              <a:ext uri="{FF2B5EF4-FFF2-40B4-BE49-F238E27FC236}">
-                <a16:creationId xmlns:a16="http://schemas.microsoft.com/office/drawing/2014/main" id="{8E8CD8B4-D408-3CED-6FE2-132B6E69AFB4}"/>
+          <p:cNvPr id="13" name="그림 12">
+            <a:extLst>
+              <a:ext uri="{FF2B5EF4-FFF2-40B4-BE49-F238E27FC236}">
+                <a16:creationId xmlns:a16="http://schemas.microsoft.com/office/drawing/2014/main" id="{2D3CBF76-4296-9B93-4B02-045ADCA5B873}"/>
               </a:ext>
             </a:extLst>
           </p:cNvPr>
@@ -3955,98 +3830,8 @@
         </p:blipFill>
         <p:spPr>
           <a:xfrm>
-            <a:off x="6655744" y="1195376"/>
-            <a:ext cx="4933353" cy="2560320"/>
-          </a:xfrm>
-          <a:prstGeom prst="rect">
-            <a:avLst/>
-          </a:prstGeom>
-        </p:spPr>
-      </p:pic>
-      <p:pic>
-        <p:nvPicPr>
-          <p:cNvPr id="8" name="그림 7">
-            <a:extLst>
-              <a:ext uri="{FF2B5EF4-FFF2-40B4-BE49-F238E27FC236}">
-                <a16:creationId xmlns:a16="http://schemas.microsoft.com/office/drawing/2014/main" id="{37EE31BD-DE30-BD28-0435-BB927FF66327}"/>
-              </a:ext>
-            </a:extLst>
-          </p:cNvPr>
-          <p:cNvPicPr>
-            <a:picLocks noChangeAspect="1"/>
-          </p:cNvPicPr>
-          <p:nvPr/>
-        </p:nvPicPr>
-        <p:blipFill>
-          <a:blip r:embed="rId3"/>
-          <a:stretch>
-            <a:fillRect/>
-          </a:stretch>
-        </p:blipFill>
-        <p:spPr>
-          <a:xfrm>
-            <a:off x="6655743" y="3999649"/>
-            <a:ext cx="4933354" cy="2560320"/>
-          </a:xfrm>
-          <a:prstGeom prst="rect">
-            <a:avLst/>
-          </a:prstGeom>
-        </p:spPr>
-      </p:pic>
-      <p:pic>
-        <p:nvPicPr>
-          <p:cNvPr id="6" name="그림 5">
-            <a:extLst>
-              <a:ext uri="{FF2B5EF4-FFF2-40B4-BE49-F238E27FC236}">
-                <a16:creationId xmlns:a16="http://schemas.microsoft.com/office/drawing/2014/main" id="{9F7D1B08-3777-09A4-D21D-024686A01CDE}"/>
-              </a:ext>
-            </a:extLst>
-          </p:cNvPr>
-          <p:cNvPicPr>
-            <a:picLocks noChangeAspect="1"/>
-          </p:cNvPicPr>
-          <p:nvPr/>
-        </p:nvPicPr>
-        <p:blipFill>
-          <a:blip r:embed="rId4"/>
-          <a:stretch>
-            <a:fillRect/>
-          </a:stretch>
-        </p:blipFill>
-        <p:spPr>
-          <a:xfrm>
-            <a:off x="6655742" y="1182972"/>
-            <a:ext cx="4973881" cy="2585128"/>
-          </a:xfrm>
-          <a:prstGeom prst="rect">
-            <a:avLst/>
-          </a:prstGeom>
-        </p:spPr>
-      </p:pic>
-      <p:pic>
-        <p:nvPicPr>
-          <p:cNvPr id="14" name="그림 13">
-            <a:extLst>
-              <a:ext uri="{FF2B5EF4-FFF2-40B4-BE49-F238E27FC236}">
-                <a16:creationId xmlns:a16="http://schemas.microsoft.com/office/drawing/2014/main" id="{ADF9B53D-C896-91DD-30D7-C257616A01DE}"/>
-              </a:ext>
-            </a:extLst>
-          </p:cNvPr>
-          <p:cNvPicPr>
-            <a:picLocks noChangeAspect="1"/>
-          </p:cNvPicPr>
-          <p:nvPr/>
-        </p:nvPicPr>
-        <p:blipFill>
-          <a:blip r:embed="rId5"/>
-          <a:stretch>
-            <a:fillRect/>
-          </a:stretch>
-        </p:blipFill>
-        <p:spPr>
-          <a:xfrm>
-            <a:off x="6598766" y="3910132"/>
-            <a:ext cx="5047308" cy="2649837"/>
+            <a:off x="622208" y="1046773"/>
+            <a:ext cx="10539626" cy="5611202"/>
           </a:xfrm>
           <a:prstGeom prst="rect">
             <a:avLst/>
@@ -4074,7 +3859,7 @@
         <p:cNvPr id="1" name="">
           <a:extLst>
             <a:ext uri="{FF2B5EF4-FFF2-40B4-BE49-F238E27FC236}">
-              <a16:creationId xmlns:a16="http://schemas.microsoft.com/office/drawing/2014/main" id="{7A3FBC28-1914-4EE1-FD55-71EAF3B06957}"/>
+              <a16:creationId xmlns:a16="http://schemas.microsoft.com/office/drawing/2014/main" id="{B3E3D773-E1B6-E6AD-B894-1C1EEF9B41A0}"/>
             </a:ext>
           </a:extLst>
         </p:cNvPr>
@@ -4094,7 +3879,7 @@
           <p:cNvPr id="2" name="제목 1">
             <a:extLst>
               <a:ext uri="{FF2B5EF4-FFF2-40B4-BE49-F238E27FC236}">
-                <a16:creationId xmlns:a16="http://schemas.microsoft.com/office/drawing/2014/main" id="{497885D2-AD9B-80BB-27AD-EE2CFB859935}"/>
+                <a16:creationId xmlns:a16="http://schemas.microsoft.com/office/drawing/2014/main" id="{BA0C1937-21D9-295A-ACD9-3FCD4EC2E697}"/>
               </a:ext>
             </a:extLst>
           </p:cNvPr>
@@ -4119,7 +3904,7 @@
           <a:p>
             <a:r>
               <a:rPr lang="en-US" altLang="ko-KR" b="1" dirty="0"/>
-              <a:t>4. Linear Mapping</a:t>
+              <a:t>1. Motor Linearization</a:t>
             </a:r>
             <a:br>
               <a:rPr lang="ko-KR" altLang="ko-KR" b="1" dirty="0"/>
@@ -4128,367 +3913,12 @@
           </a:p>
         </p:txBody>
       </p:sp>
-      <mc:AlternateContent xmlns:mc="http://schemas.openxmlformats.org/markup-compatibility/2006" xmlns:a14="http://schemas.microsoft.com/office/drawing/2010/main">
-        <mc:Choice Requires="a14">
-          <p:sp>
-            <p:nvSpPr>
-              <p:cNvPr id="4" name="내용 개체 틀 3">
-                <a:extLst>
-                  <a:ext uri="{FF2B5EF4-FFF2-40B4-BE49-F238E27FC236}">
-                    <a16:creationId xmlns:a16="http://schemas.microsoft.com/office/drawing/2014/main" id="{47183B6A-7B2A-A2CF-F3FB-3B86B8767B6A}"/>
-                  </a:ext>
-                </a:extLst>
-              </p:cNvPr>
-              <p:cNvSpPr>
-                <a:spLocks noGrp="1"/>
-              </p:cNvSpPr>
-              <p:nvPr>
-                <p:ph idx="1"/>
-              </p:nvPr>
-            </p:nvSpPr>
-            <p:spPr>
-              <a:xfrm>
-                <a:off x="444500" y="1253331"/>
-                <a:ext cx="5651500" cy="4351338"/>
-              </a:xfrm>
-            </p:spPr>
-            <p:txBody>
-              <a:bodyPr>
-                <a:normAutofit/>
-              </a:bodyPr>
-              <a:lstStyle/>
-              <a:p>
-                <a:pPr marL="514350" indent="-514350">
-                  <a:buFont typeface="+mj-lt"/>
-                  <a:buAutoNum type="arabicParenR"/>
-                </a:pPr>
-                <a:r>
-                  <a:rPr lang="en-US" altLang="ko-KR" b="1" dirty="0">
-                    <a:solidFill>
-                      <a:schemeClr val="tx2">
-                        <a:lumMod val="90000"/>
-                        <a:lumOff val="10000"/>
-                      </a:schemeClr>
-                    </a:solidFill>
-                  </a:rPr>
-                  <a:t>Input Range: </a:t>
-                </a:r>
-              </a:p>
-              <a:p>
-                <a:pPr marL="0" indent="0">
-                  <a:buNone/>
-                </a:pPr>
-                <a14:m>
-                  <m:oMathPara xmlns:m="http://schemas.openxmlformats.org/officeDocument/2006/math">
-                    <m:oMathParaPr>
-                      <m:jc m:val="centerGroup"/>
-                    </m:oMathParaPr>
-                    <m:oMath xmlns:m="http://schemas.openxmlformats.org/officeDocument/2006/math">
-                      <m:sSub>
-                        <m:sSubPr>
-                          <m:ctrlPr>
-                            <a:rPr lang="en-US" altLang="ko-KR" sz="2400" b="0" i="1" dirty="0" smtClean="0">
-                              <a:latin typeface="Cambria Math" panose="02040503050406030204" pitchFamily="18" charset="0"/>
-                            </a:rPr>
-                          </m:ctrlPr>
-                        </m:sSubPr>
-                        <m:e>
-                          <m:r>
-                            <a:rPr lang="en-US" altLang="ko-KR" sz="2400" b="0" i="1" dirty="0" smtClean="0">
-                              <a:latin typeface="Cambria Math" panose="02040503050406030204" pitchFamily="18" charset="0"/>
-                            </a:rPr>
-                            <m:t>𝑉</m:t>
-                          </m:r>
-                        </m:e>
-                        <m:sub>
-                          <m:r>
-                            <a:rPr lang="en-US" altLang="ko-KR" sz="2400" b="0" i="1" dirty="0" smtClean="0">
-                              <a:latin typeface="Cambria Math" panose="02040503050406030204" pitchFamily="18" charset="0"/>
-                            </a:rPr>
-                            <m:t>𝑐𝑚𝑑</m:t>
-                          </m:r>
-                        </m:sub>
-                      </m:sSub>
-                      <m:r>
-                        <a:rPr lang="en-US" altLang="ko-KR" sz="2400" b="0" i="1" dirty="0" smtClean="0">
-                          <a:latin typeface="Cambria Math" panose="02040503050406030204" pitchFamily="18" charset="0"/>
-                        </a:rPr>
-                        <m:t>=−1.8 </m:t>
-                      </m:r>
-                      <m:r>
-                        <a:rPr lang="en-US" altLang="ko-KR" sz="2400" b="0" i="1" dirty="0" smtClean="0">
-                          <a:latin typeface="Cambria Math" panose="02040503050406030204" pitchFamily="18" charset="0"/>
-                        </a:rPr>
-                        <m:t>𝑡𝑜</m:t>
-                      </m:r>
-                      <m:r>
-                        <a:rPr lang="en-US" altLang="ko-KR" sz="2400" b="0" i="1" dirty="0" smtClean="0">
-                          <a:latin typeface="Cambria Math" panose="02040503050406030204" pitchFamily="18" charset="0"/>
-                        </a:rPr>
-                        <m:t> 1.8 [</m:t>
-                      </m:r>
-                      <m:r>
-                        <a:rPr lang="en-US" altLang="ko-KR" sz="2400" b="0" i="1" dirty="0" smtClean="0">
-                          <a:latin typeface="Cambria Math" panose="02040503050406030204" pitchFamily="18" charset="0"/>
-                        </a:rPr>
-                        <m:t>𝑉</m:t>
-                      </m:r>
-                      <m:r>
-                        <a:rPr lang="en-US" altLang="ko-KR" sz="2400" b="0" i="1" dirty="0" smtClean="0">
-                          <a:latin typeface="Cambria Math" panose="02040503050406030204" pitchFamily="18" charset="0"/>
-                        </a:rPr>
-                        <m:t>]</m:t>
-                      </m:r>
-                    </m:oMath>
-                  </m:oMathPara>
-                </a14:m>
-                <a:endParaRPr lang="en-US" altLang="ko-KR" sz="2400" dirty="0"/>
-              </a:p>
-              <a:p>
-                <a:pPr marL="0" indent="0">
-                  <a:buNone/>
-                </a:pPr>
-                <a:endParaRPr lang="en-US" altLang="ko-KR" sz="2400" dirty="0"/>
-              </a:p>
-              <a:p>
-                <a:pPr marL="0" indent="0">
-                  <a:buNone/>
-                </a:pPr>
-                <a:r>
-                  <a:rPr lang="en-US" altLang="ko-KR" b="1" dirty="0">
-                    <a:solidFill>
-                      <a:schemeClr val="tx2">
-                        <a:lumMod val="90000"/>
-                        <a:lumOff val="10000"/>
-                      </a:schemeClr>
-                    </a:solidFill>
-                  </a:rPr>
-                  <a:t>2) </a:t>
-                </a:r>
-                <a:r>
-                  <a:rPr lang="en-US" altLang="ko-KR" b="1" dirty="0" err="1">
-                    <a:solidFill>
-                      <a:schemeClr val="tx2">
-                        <a:lumMod val="90000"/>
-                        <a:lumOff val="10000"/>
-                      </a:schemeClr>
-                    </a:solidFill>
-                  </a:rPr>
-                  <a:t>Deadzone</a:t>
-                </a:r>
-                <a:r>
-                  <a:rPr lang="en-US" altLang="ko-KR" b="1" dirty="0">
-                    <a:solidFill>
-                      <a:schemeClr val="tx2">
-                        <a:lumMod val="90000"/>
-                        <a:lumOff val="10000"/>
-                      </a:schemeClr>
-                    </a:solidFill>
-                  </a:rPr>
-                  <a:t> Setting: </a:t>
-                </a:r>
-              </a:p>
-              <a:p>
-                <a:pPr marL="0" indent="0">
-                  <a:buNone/>
-                </a:pPr>
-                <a14:m>
-                  <m:oMathPara xmlns:m="http://schemas.openxmlformats.org/officeDocument/2006/math">
-                    <m:oMathParaPr>
-                      <m:jc m:val="centerGroup"/>
-                    </m:oMathParaPr>
-                    <m:oMath xmlns:m="http://schemas.openxmlformats.org/officeDocument/2006/math">
-                      <m:r>
-                        <a:rPr lang="en-US" altLang="ko-KR" sz="2400" i="1" dirty="0">
-                          <a:latin typeface="Cambria Math" panose="02040503050406030204" pitchFamily="18" charset="0"/>
-                        </a:rPr>
-                        <m:t>−</m:t>
-                      </m:r>
-                      <m:r>
-                        <a:rPr lang="en-US" altLang="ko-KR" sz="2400" i="1" dirty="0" smtClean="0">
-                          <a:latin typeface="Cambria Math" panose="02040503050406030204" pitchFamily="18" charset="0"/>
-                        </a:rPr>
-                        <m:t>0.0</m:t>
-                      </m:r>
-                      <m:r>
-                        <a:rPr lang="en-US" altLang="ko-KR" sz="2400" b="0" i="1" dirty="0" smtClean="0">
-                          <a:latin typeface="Cambria Math" panose="02040503050406030204" pitchFamily="18" charset="0"/>
-                        </a:rPr>
-                        <m:t>5 </m:t>
-                      </m:r>
-                      <m:r>
-                        <a:rPr lang="en-US" altLang="ko-KR" sz="2400" b="0" i="1" dirty="0" smtClean="0">
-                          <a:latin typeface="Cambria Math" panose="02040503050406030204" pitchFamily="18" charset="0"/>
-                        </a:rPr>
-                        <m:t>𝑡𝑜</m:t>
-                      </m:r>
-                      <m:r>
-                        <a:rPr lang="en-US" altLang="ko-KR" sz="2400" b="0" i="1" dirty="0" smtClean="0">
-                          <a:latin typeface="Cambria Math" panose="02040503050406030204" pitchFamily="18" charset="0"/>
-                        </a:rPr>
-                        <m:t>+0.0</m:t>
-                      </m:r>
-                      <m:r>
-                        <a:rPr lang="en-US" altLang="ko-KR" sz="2400" b="0" i="0" dirty="0" smtClean="0">
-                          <a:latin typeface="Cambria Math" panose="02040503050406030204" pitchFamily="18" charset="0"/>
-                        </a:rPr>
-                        <m:t>5[</m:t>
-                      </m:r>
-                      <m:r>
-                        <m:rPr>
-                          <m:sty m:val="p"/>
-                        </m:rPr>
-                        <a:rPr lang="en-US" altLang="ko-KR" sz="2400" b="0" i="0" dirty="0" smtClean="0">
-                          <a:latin typeface="Cambria Math" panose="02040503050406030204" pitchFamily="18" charset="0"/>
-                        </a:rPr>
-                        <m:t>V</m:t>
-                      </m:r>
-                      <m:r>
-                        <a:rPr lang="en-US" altLang="ko-KR" sz="2400" b="0" i="0" dirty="0" smtClean="0">
-                          <a:latin typeface="Cambria Math" panose="02040503050406030204" pitchFamily="18" charset="0"/>
-                        </a:rPr>
-                        <m:t>]</m:t>
-                      </m:r>
-                    </m:oMath>
-                  </m:oMathPara>
-                </a14:m>
-                <a:endParaRPr lang="en-US" altLang="ko-KR" sz="2400" dirty="0"/>
-              </a:p>
-              <a:p>
-                <a:pPr marL="0" indent="0">
-                  <a:buNone/>
-                </a:pPr>
-                <a:endParaRPr lang="en-US" altLang="ko-KR" sz="2400" dirty="0"/>
-              </a:p>
-              <a:p>
-                <a:pPr marL="0" indent="0">
-                  <a:buNone/>
-                </a:pPr>
-                <a:r>
-                  <a:rPr lang="en-US" altLang="ko-KR" b="1" dirty="0">
-                    <a:solidFill>
-                      <a:schemeClr val="tx2">
-                        <a:lumMod val="90000"/>
-                        <a:lumOff val="10000"/>
-                      </a:schemeClr>
-                    </a:solidFill>
-                  </a:rPr>
-                  <a:t>3) Linear Slope: </a:t>
-                </a:r>
-                <a:endParaRPr lang="en-US" altLang="ko-KR" sz="2400" b="0" i="1" dirty="0">
-                  <a:latin typeface="Cambria Math" panose="02040503050406030204" pitchFamily="18" charset="0"/>
-                </a:endParaRPr>
-              </a:p>
-              <a:p>
-                <a:pPr marL="0" indent="0" algn="ctr">
-                  <a:buNone/>
-                </a:pPr>
-                <a14:m>
-                  <m:oMath xmlns:m="http://schemas.openxmlformats.org/officeDocument/2006/math">
-                    <m:r>
-                      <a:rPr lang="en-US" altLang="ko-KR" sz="2400" b="0" i="1" smtClean="0">
-                        <a:latin typeface="Cambria Math" panose="02040503050406030204" pitchFamily="18" charset="0"/>
-                      </a:rPr>
-                      <m:t>970 [</m:t>
-                    </m:r>
-                    <m:f>
-                      <m:fPr>
-                        <m:ctrlPr>
-                          <a:rPr lang="en-US" altLang="ko-KR" sz="2400" b="0" i="1" smtClean="0">
-                            <a:latin typeface="Cambria Math" panose="02040503050406030204" pitchFamily="18" charset="0"/>
-                          </a:rPr>
-                        </m:ctrlPr>
-                      </m:fPr>
-                      <m:num>
-                        <m:r>
-                          <a:rPr lang="en-US" altLang="ko-KR" sz="2400" b="0" i="1" smtClean="0">
-                            <a:latin typeface="Cambria Math" panose="02040503050406030204" pitchFamily="18" charset="0"/>
-                          </a:rPr>
-                          <m:t>𝑑𝑒𝑔</m:t>
-                        </m:r>
-                      </m:num>
-                      <m:den>
-                        <m:r>
-                          <a:rPr lang="en-US" altLang="ko-KR" sz="2400" b="0" i="1" smtClean="0">
-                            <a:latin typeface="Cambria Math" panose="02040503050406030204" pitchFamily="18" charset="0"/>
-                          </a:rPr>
-                          <m:t>𝑠𝑒𝑐</m:t>
-                        </m:r>
-                      </m:den>
-                    </m:f>
-                    <m:r>
-                      <a:rPr lang="en-US" altLang="ko-KR" sz="2400" b="0" i="1" smtClean="0">
-                        <a:latin typeface="Cambria Math" panose="02040503050406030204" pitchFamily="18" charset="0"/>
-                      </a:rPr>
-                      <m:t>/</m:t>
-                    </m:r>
-                    <m:r>
-                      <a:rPr lang="en-US" altLang="ko-KR" sz="2400" b="0" i="1" smtClean="0">
-                        <a:latin typeface="Cambria Math" panose="02040503050406030204" pitchFamily="18" charset="0"/>
-                      </a:rPr>
-                      <m:t>𝑉</m:t>
-                    </m:r>
-                  </m:oMath>
-                </a14:m>
-                <a:r>
-                  <a:rPr lang="en-US" altLang="ko-KR" sz="2400" dirty="0"/>
-                  <a:t>]</a:t>
-                </a:r>
-                <a:endParaRPr lang="ko-KR" altLang="en-US" sz="2400" dirty="0"/>
-              </a:p>
-            </p:txBody>
-          </p:sp>
-        </mc:Choice>
-        <mc:Fallback xmlns="">
-          <p:sp>
-            <p:nvSpPr>
-              <p:cNvPr id="4" name="내용 개체 틀 3">
-                <a:extLst>
-                  <a:ext uri="{FF2B5EF4-FFF2-40B4-BE49-F238E27FC236}">
-                    <a16:creationId xmlns:a16="http://schemas.microsoft.com/office/drawing/2014/main" id="{47183B6A-7B2A-A2CF-F3FB-3B86B8767B6A}"/>
-                  </a:ext>
-                </a:extLst>
-              </p:cNvPr>
-              <p:cNvSpPr>
-                <a:spLocks noGrp="1" noRot="1" noChangeAspect="1" noMove="1" noResize="1" noEditPoints="1" noAdjustHandles="1" noChangeArrowheads="1" noChangeShapeType="1" noTextEdit="1"/>
-              </p:cNvSpPr>
-              <p:nvPr>
-                <p:ph idx="1"/>
-              </p:nvPr>
-            </p:nvSpPr>
-            <p:spPr>
-              <a:xfrm>
-                <a:off x="444500" y="1253331"/>
-                <a:ext cx="5651500" cy="4351338"/>
-              </a:xfrm>
-              <a:blipFill>
-                <a:blip r:embed="rId2"/>
-                <a:stretch>
-                  <a:fillRect l="-2589" t="-3647"/>
-                </a:stretch>
-              </a:blipFill>
-            </p:spPr>
-            <p:txBody>
-              <a:bodyPr/>
-              <a:lstStyle/>
-              <a:p>
-                <a:r>
-                  <a:rPr lang="ko-KR" altLang="en-US">
-                    <a:noFill/>
-                  </a:rPr>
-                  <a:t> </a:t>
-                </a:r>
-              </a:p>
-            </p:txBody>
-          </p:sp>
-        </mc:Fallback>
-      </mc:AlternateContent>
       <p:sp>
         <p:nvSpPr>
           <p:cNvPr id="3" name="직사각형 2">
             <a:extLst>
               <a:ext uri="{FF2B5EF4-FFF2-40B4-BE49-F238E27FC236}">
-                <a16:creationId xmlns:a16="http://schemas.microsoft.com/office/drawing/2014/main" id="{7AE20AC4-BD6E-B49E-E9A7-AE634C1096DB}"/>
+                <a16:creationId xmlns:a16="http://schemas.microsoft.com/office/drawing/2014/main" id="{AAF9A0FC-2DA8-81CC-981B-C13313E4E352}"/>
               </a:ext>
             </a:extLst>
           </p:cNvPr>
@@ -4545,10 +3975,10 @@
       </p:sp>
       <p:pic>
         <p:nvPicPr>
-          <p:cNvPr id="6" name="그림 5">
-            <a:extLst>
-              <a:ext uri="{FF2B5EF4-FFF2-40B4-BE49-F238E27FC236}">
-                <a16:creationId xmlns:a16="http://schemas.microsoft.com/office/drawing/2014/main" id="{C9605A56-BC8F-9A7F-1E73-AEFACF13F8A8}"/>
+          <p:cNvPr id="5" name="그림 4">
+            <a:extLst>
+              <a:ext uri="{FF2B5EF4-FFF2-40B4-BE49-F238E27FC236}">
+                <a16:creationId xmlns:a16="http://schemas.microsoft.com/office/drawing/2014/main" id="{117DD22B-344C-34D9-9072-DEF972028EB7}"/>
               </a:ext>
             </a:extLst>
           </p:cNvPr>
@@ -4558,105 +3988,15 @@
           <p:nvPr/>
         </p:nvPicPr>
         <p:blipFill>
-          <a:blip r:embed="rId3"/>
+          <a:blip r:embed="rId2"/>
           <a:stretch>
             <a:fillRect/>
           </a:stretch>
         </p:blipFill>
         <p:spPr>
           <a:xfrm>
-            <a:off x="6683835" y="987093"/>
-            <a:ext cx="4650916" cy="2840086"/>
-          </a:xfrm>
-          <a:prstGeom prst="rect">
-            <a:avLst/>
-          </a:prstGeom>
-        </p:spPr>
-      </p:pic>
-      <p:pic>
-        <p:nvPicPr>
-          <p:cNvPr id="11" name="그림 10">
-            <a:extLst>
-              <a:ext uri="{FF2B5EF4-FFF2-40B4-BE49-F238E27FC236}">
-                <a16:creationId xmlns:a16="http://schemas.microsoft.com/office/drawing/2014/main" id="{5A9D67AC-06B8-E775-6A81-74C496123817}"/>
-              </a:ext>
-            </a:extLst>
-          </p:cNvPr>
-          <p:cNvPicPr>
-            <a:picLocks noChangeAspect="1"/>
-          </p:cNvPicPr>
-          <p:nvPr/>
-        </p:nvPicPr>
-        <p:blipFill>
-          <a:blip r:embed="rId4"/>
-          <a:stretch>
-            <a:fillRect/>
-          </a:stretch>
-        </p:blipFill>
-        <p:spPr>
-          <a:xfrm>
-            <a:off x="6683835" y="3827179"/>
-            <a:ext cx="4650916" cy="2860397"/>
-          </a:xfrm>
-          <a:prstGeom prst="rect">
-            <a:avLst/>
-          </a:prstGeom>
-        </p:spPr>
-      </p:pic>
-      <p:pic>
-        <p:nvPicPr>
-          <p:cNvPr id="13" name="그림 12">
-            <a:extLst>
-              <a:ext uri="{FF2B5EF4-FFF2-40B4-BE49-F238E27FC236}">
-                <a16:creationId xmlns:a16="http://schemas.microsoft.com/office/drawing/2014/main" id="{5C4EC07D-7CAB-0D84-650C-BB147A0C7D11}"/>
-              </a:ext>
-            </a:extLst>
-          </p:cNvPr>
-          <p:cNvPicPr>
-            <a:picLocks noChangeAspect="1"/>
-          </p:cNvPicPr>
-          <p:nvPr/>
-        </p:nvPicPr>
-        <p:blipFill>
-          <a:blip r:embed="rId5"/>
-          <a:stretch>
-            <a:fillRect/>
-          </a:stretch>
-        </p:blipFill>
-        <p:spPr>
-          <a:xfrm>
-            <a:off x="6683835" y="987093"/>
-            <a:ext cx="4733465" cy="2868429"/>
-          </a:xfrm>
-          <a:prstGeom prst="rect">
-            <a:avLst/>
-          </a:prstGeom>
-        </p:spPr>
-      </p:pic>
-      <p:pic>
-        <p:nvPicPr>
-          <p:cNvPr id="15" name="그림 14">
-            <a:extLst>
-              <a:ext uri="{FF2B5EF4-FFF2-40B4-BE49-F238E27FC236}">
-                <a16:creationId xmlns:a16="http://schemas.microsoft.com/office/drawing/2014/main" id="{C32B8308-1E0B-E650-DC31-CAD71E4E4B88}"/>
-              </a:ext>
-            </a:extLst>
-          </p:cNvPr>
-          <p:cNvPicPr>
-            <a:picLocks noChangeAspect="1"/>
-          </p:cNvPicPr>
-          <p:nvPr/>
-        </p:nvPicPr>
-        <p:blipFill>
-          <a:blip r:embed="rId6"/>
-          <a:stretch>
-            <a:fillRect/>
-          </a:stretch>
-        </p:blipFill>
-        <p:spPr>
-          <a:xfrm>
-            <a:off x="6683835" y="3855522"/>
-            <a:ext cx="4617892" cy="2840086"/>
+            <a:off x="734672" y="1095082"/>
+            <a:ext cx="10331728" cy="5454375"/>
           </a:xfrm>
           <a:prstGeom prst="rect">
             <a:avLst/>
@@ -4666,7 +4006,7 @@
     </p:spTree>
     <p:extLst>
       <p:ext uri="{BB962C8B-B14F-4D97-AF65-F5344CB8AC3E}">
-        <p14:creationId xmlns:p14="http://schemas.microsoft.com/office/powerpoint/2010/main" val="3431629925"/>
+        <p14:creationId xmlns:p14="http://schemas.microsoft.com/office/powerpoint/2010/main" val="2388982965"/>
       </p:ext>
     </p:extLst>
   </p:cSld>
@@ -4684,7 +4024,7 @@
         <p:cNvPr id="1" name="">
           <a:extLst>
             <a:ext uri="{FF2B5EF4-FFF2-40B4-BE49-F238E27FC236}">
-              <a16:creationId xmlns:a16="http://schemas.microsoft.com/office/drawing/2014/main" id="{389DBD12-BC90-0027-1B79-06B17B38F5D9}"/>
+              <a16:creationId xmlns:a16="http://schemas.microsoft.com/office/drawing/2014/main" id="{6E9BB19F-64D6-90B5-1B84-CDF5D2D0D41F}"/>
             </a:ext>
           </a:extLst>
         </p:cNvPr>
@@ -4704,7 +4044,7 @@
           <p:cNvPr id="2" name="제목 1">
             <a:extLst>
               <a:ext uri="{FF2B5EF4-FFF2-40B4-BE49-F238E27FC236}">
-                <a16:creationId xmlns:a16="http://schemas.microsoft.com/office/drawing/2014/main" id="{5CAE79C5-7D1A-2100-079F-BEC3171F0BF1}"/>
+                <a16:creationId xmlns:a16="http://schemas.microsoft.com/office/drawing/2014/main" id="{495AC25D-E7CD-11C3-16FF-9533684655E2}"/>
               </a:ext>
             </a:extLst>
           </p:cNvPr>
@@ -4718,7 +4058,7 @@
         <p:spPr>
           <a:xfrm>
             <a:off x="171450" y="200025"/>
-            <a:ext cx="10515600" cy="1325563"/>
+            <a:ext cx="11576050" cy="1325563"/>
           </a:xfrm>
         </p:spPr>
         <p:txBody>
@@ -4729,7 +4069,7 @@
           <a:p>
             <a:r>
               <a:rPr lang="en-US" altLang="ko-KR" b="1" dirty="0"/>
-              <a:t>5. Linearization Validation</a:t>
+              <a:t>1. Motor Linearization</a:t>
             </a:r>
             <a:br>
               <a:rPr lang="ko-KR" altLang="ko-KR" b="1" dirty="0"/>
@@ -4738,140 +4078,12 @@
           </a:p>
         </p:txBody>
       </p:sp>
-      <mc:AlternateContent xmlns:mc="http://schemas.openxmlformats.org/markup-compatibility/2006" xmlns:a14="http://schemas.microsoft.com/office/drawing/2010/main">
-        <mc:Choice Requires="a14">
-          <p:sp>
-            <p:nvSpPr>
-              <p:cNvPr id="4" name="내용 개체 틀 3">
-                <a:extLst>
-                  <a:ext uri="{FF2B5EF4-FFF2-40B4-BE49-F238E27FC236}">
-                    <a16:creationId xmlns:a16="http://schemas.microsoft.com/office/drawing/2014/main" id="{16D06899-AA9F-900E-3303-0F4EAD429263}"/>
-                  </a:ext>
-                </a:extLst>
-              </p:cNvPr>
-              <p:cNvSpPr>
-                <a:spLocks noGrp="1"/>
-              </p:cNvSpPr>
-              <p:nvPr>
-                <p:ph idx="1"/>
-              </p:nvPr>
-            </p:nvSpPr>
-            <p:spPr>
-              <a:xfrm>
-                <a:off x="444500" y="1253331"/>
-                <a:ext cx="5956300" cy="4351338"/>
-              </a:xfrm>
-            </p:spPr>
-            <p:txBody>
-              <a:bodyPr/>
-              <a:lstStyle/>
-              <a:p>
-                <a:pPr marL="0" indent="0">
-                  <a:buNone/>
-                </a:pPr>
-                <a:r>
-                  <a:rPr lang="en-US" altLang="ko-KR" b="1" dirty="0">
-                    <a:solidFill>
-                      <a:schemeClr val="tx2">
-                        <a:lumMod val="90000"/>
-                        <a:lumOff val="10000"/>
-                      </a:schemeClr>
-                    </a:solidFill>
-                  </a:rPr>
-                  <a:t>Full-Range Verification: </a:t>
-                </a:r>
-                <a:r>
-                  <a:rPr lang="en-US" altLang="ko-KR" dirty="0"/>
-                  <a:t>Applied both triangle and sine waves to sweep the entire spectrum of input </a:t>
-                </a:r>
-                <a14:m>
-                  <m:oMath xmlns:m="http://schemas.openxmlformats.org/officeDocument/2006/math">
-                    <m:sSub>
-                      <m:sSubPr>
-                        <m:ctrlPr>
-                          <a:rPr lang="en-US" altLang="ko-KR" i="1" dirty="0">
-                            <a:latin typeface="Cambria Math" panose="02040503050406030204" pitchFamily="18" charset="0"/>
-                          </a:rPr>
-                        </m:ctrlPr>
-                      </m:sSubPr>
-                      <m:e>
-                        <m:r>
-                          <a:rPr lang="en-US" altLang="ko-KR" i="1" dirty="0">
-                            <a:latin typeface="Cambria Math" panose="02040503050406030204" pitchFamily="18" charset="0"/>
-                          </a:rPr>
-                          <m:t>𝑉</m:t>
-                        </m:r>
-                      </m:e>
-                      <m:sub>
-                        <m:r>
-                          <a:rPr lang="en-US" altLang="ko-KR" i="1" dirty="0">
-                            <a:latin typeface="Cambria Math" panose="02040503050406030204" pitchFamily="18" charset="0"/>
-                          </a:rPr>
-                          <m:t>𝑐𝑚𝑑</m:t>
-                        </m:r>
-                      </m:sub>
-                    </m:sSub>
-                  </m:oMath>
-                </a14:m>
-                <a:r>
-                  <a:rPr lang="en-US" altLang="ko-KR" dirty="0"/>
-                  <a:t>.</a:t>
-                </a:r>
-                <a:endParaRPr lang="ko-KR" altLang="en-US" dirty="0"/>
-              </a:p>
-            </p:txBody>
-          </p:sp>
-        </mc:Choice>
-        <mc:Fallback xmlns="">
-          <p:sp>
-            <p:nvSpPr>
-              <p:cNvPr id="4" name="내용 개체 틀 3">
-                <a:extLst>
-                  <a:ext uri="{FF2B5EF4-FFF2-40B4-BE49-F238E27FC236}">
-                    <a16:creationId xmlns:a16="http://schemas.microsoft.com/office/drawing/2014/main" id="{16D06899-AA9F-900E-3303-0F4EAD429263}"/>
-                  </a:ext>
-                </a:extLst>
-              </p:cNvPr>
-              <p:cNvSpPr>
-                <a:spLocks noGrp="1" noRot="1" noChangeAspect="1" noMove="1" noResize="1" noEditPoints="1" noAdjustHandles="1" noChangeArrowheads="1" noChangeShapeType="1" noTextEdit="1"/>
-              </p:cNvSpPr>
-              <p:nvPr>
-                <p:ph idx="1"/>
-              </p:nvPr>
-            </p:nvSpPr>
-            <p:spPr>
-              <a:xfrm>
-                <a:off x="444500" y="1253331"/>
-                <a:ext cx="5956300" cy="4351338"/>
-              </a:xfrm>
-              <a:blipFill>
-                <a:blip r:embed="rId2"/>
-                <a:stretch>
-                  <a:fillRect l="-2149" t="-2525" r="-3275"/>
-                </a:stretch>
-              </a:blipFill>
-            </p:spPr>
-            <p:txBody>
-              <a:bodyPr/>
-              <a:lstStyle/>
-              <a:p>
-                <a:r>
-                  <a:rPr lang="ko-KR" altLang="en-US">
-                    <a:noFill/>
-                  </a:rPr>
-                  <a:t> </a:t>
-                </a:r>
-              </a:p>
-            </p:txBody>
-          </p:sp>
-        </mc:Fallback>
-      </mc:AlternateContent>
       <p:sp>
         <p:nvSpPr>
           <p:cNvPr id="3" name="직사각형 2">
             <a:extLst>
               <a:ext uri="{FF2B5EF4-FFF2-40B4-BE49-F238E27FC236}">
-                <a16:creationId xmlns:a16="http://schemas.microsoft.com/office/drawing/2014/main" id="{F6AE9F09-6938-BA6B-831B-DDAC6334549F}"/>
+                <a16:creationId xmlns:a16="http://schemas.microsoft.com/office/drawing/2014/main" id="{8A7F1CFA-E0CA-F309-EC0A-89D037B9F7F2}"/>
               </a:ext>
             </a:extLst>
           </p:cNvPr>
@@ -4928,10 +4140,10 @@
       </p:sp>
       <p:pic>
         <p:nvPicPr>
-          <p:cNvPr id="5" name="그림 4">
-            <a:extLst>
-              <a:ext uri="{FF2B5EF4-FFF2-40B4-BE49-F238E27FC236}">
-                <a16:creationId xmlns:a16="http://schemas.microsoft.com/office/drawing/2014/main" id="{9A788F7D-8161-8459-7BA5-4587B2F2F0CC}"/>
+          <p:cNvPr id="10" name="그림 9">
+            <a:extLst>
+              <a:ext uri="{FF2B5EF4-FFF2-40B4-BE49-F238E27FC236}">
+                <a16:creationId xmlns:a16="http://schemas.microsoft.com/office/drawing/2014/main" id="{FB1C18F2-9067-A2AE-1E8E-1971905C50EF}"/>
               </a:ext>
             </a:extLst>
           </p:cNvPr>
@@ -4941,165 +4153,15 @@
           <p:nvPr/>
         </p:nvPicPr>
         <p:blipFill>
-          <a:blip r:embed="rId3"/>
+          <a:blip r:embed="rId2"/>
           <a:stretch>
             <a:fillRect/>
           </a:stretch>
         </p:blipFill>
         <p:spPr>
           <a:xfrm>
-            <a:off x="6655743" y="1164902"/>
-            <a:ext cx="4986498" cy="2590794"/>
-          </a:xfrm>
-          <a:prstGeom prst="rect">
-            <a:avLst/>
-          </a:prstGeom>
-        </p:spPr>
-      </p:pic>
-      <p:pic>
-        <p:nvPicPr>
-          <p:cNvPr id="6" name="그림 5">
-            <a:extLst>
-              <a:ext uri="{FF2B5EF4-FFF2-40B4-BE49-F238E27FC236}">
-                <a16:creationId xmlns:a16="http://schemas.microsoft.com/office/drawing/2014/main" id="{F685877F-17BF-D68A-690D-C524652C671B}"/>
-              </a:ext>
-            </a:extLst>
-          </p:cNvPr>
-          <p:cNvPicPr>
-            <a:picLocks noChangeAspect="1"/>
-          </p:cNvPicPr>
-          <p:nvPr/>
-        </p:nvPicPr>
-        <p:blipFill>
-          <a:blip r:embed="rId4"/>
-          <a:stretch>
-            <a:fillRect/>
-          </a:stretch>
-        </p:blipFill>
-        <p:spPr>
-          <a:xfrm>
-            <a:off x="6655743" y="3999648"/>
-            <a:ext cx="4896177" cy="2570299"/>
-          </a:xfrm>
-          <a:prstGeom prst="rect">
-            <a:avLst/>
-          </a:prstGeom>
-        </p:spPr>
-      </p:pic>
-      <p:pic>
-        <p:nvPicPr>
-          <p:cNvPr id="7" name="그림 6">
-            <a:extLst>
-              <a:ext uri="{FF2B5EF4-FFF2-40B4-BE49-F238E27FC236}">
-                <a16:creationId xmlns:a16="http://schemas.microsoft.com/office/drawing/2014/main" id="{6C68572A-74A5-9665-7720-8C0AF3819B6C}"/>
-              </a:ext>
-            </a:extLst>
-          </p:cNvPr>
-          <p:cNvPicPr>
-            <a:picLocks noChangeAspect="1"/>
-          </p:cNvPicPr>
-          <p:nvPr/>
-        </p:nvPicPr>
-        <p:blipFill>
-          <a:blip r:embed="rId5"/>
-          <a:stretch>
-            <a:fillRect/>
-          </a:stretch>
-        </p:blipFill>
-        <p:spPr>
-          <a:xfrm>
-            <a:off x="6637553" y="1164902"/>
-            <a:ext cx="4992070" cy="2590793"/>
-          </a:xfrm>
-          <a:prstGeom prst="rect">
-            <a:avLst/>
-          </a:prstGeom>
-        </p:spPr>
-      </p:pic>
-      <p:pic>
-        <p:nvPicPr>
-          <p:cNvPr id="8" name="그림 7">
-            <a:extLst>
-              <a:ext uri="{FF2B5EF4-FFF2-40B4-BE49-F238E27FC236}">
-                <a16:creationId xmlns:a16="http://schemas.microsoft.com/office/drawing/2014/main" id="{DA5C5BEC-D269-3FC3-B4F7-CD650AD98FF5}"/>
-              </a:ext>
-            </a:extLst>
-          </p:cNvPr>
-          <p:cNvPicPr>
-            <a:picLocks noChangeAspect="1"/>
-          </p:cNvPicPr>
-          <p:nvPr/>
-        </p:nvPicPr>
-        <p:blipFill>
-          <a:blip r:embed="rId6"/>
-          <a:stretch>
-            <a:fillRect/>
-          </a:stretch>
-        </p:blipFill>
-        <p:spPr>
-          <a:xfrm>
-            <a:off x="6655743" y="3999647"/>
-            <a:ext cx="4948988" cy="2570299"/>
-          </a:xfrm>
-          <a:prstGeom prst="rect">
-            <a:avLst/>
-          </a:prstGeom>
-        </p:spPr>
-      </p:pic>
-      <p:pic>
-        <p:nvPicPr>
-          <p:cNvPr id="12" name="그림 11">
-            <a:extLst>
-              <a:ext uri="{FF2B5EF4-FFF2-40B4-BE49-F238E27FC236}">
-                <a16:creationId xmlns:a16="http://schemas.microsoft.com/office/drawing/2014/main" id="{2C30F64B-22DB-1AFF-F011-A6A26FDDC133}"/>
-              </a:ext>
-            </a:extLst>
-          </p:cNvPr>
-          <p:cNvPicPr>
-            <a:picLocks noChangeAspect="1"/>
-          </p:cNvPicPr>
-          <p:nvPr/>
-        </p:nvPicPr>
-        <p:blipFill>
-          <a:blip r:embed="rId7"/>
-          <a:stretch>
-            <a:fillRect/>
-          </a:stretch>
-        </p:blipFill>
-        <p:spPr>
-          <a:xfrm>
-            <a:off x="6637553" y="1110527"/>
-            <a:ext cx="4986499" cy="2645168"/>
-          </a:xfrm>
-          <a:prstGeom prst="rect">
-            <a:avLst/>
-          </a:prstGeom>
-        </p:spPr>
-      </p:pic>
-      <p:pic>
-        <p:nvPicPr>
-          <p:cNvPr id="16" name="그림 15">
-            <a:extLst>
-              <a:ext uri="{FF2B5EF4-FFF2-40B4-BE49-F238E27FC236}">
-                <a16:creationId xmlns:a16="http://schemas.microsoft.com/office/drawing/2014/main" id="{15D6C8F8-FCB6-38B1-62E5-2495EA1FED74}"/>
-              </a:ext>
-            </a:extLst>
-          </p:cNvPr>
-          <p:cNvPicPr>
-            <a:picLocks noChangeAspect="1"/>
-          </p:cNvPicPr>
-          <p:nvPr/>
-        </p:nvPicPr>
-        <p:blipFill>
-          <a:blip r:embed="rId8"/>
-          <a:stretch>
-            <a:fillRect/>
-          </a:stretch>
-        </p:blipFill>
-        <p:spPr>
-          <a:xfrm>
-            <a:off x="6655743" y="3962211"/>
-            <a:ext cx="5004374" cy="2645169"/>
+            <a:off x="536296" y="1218910"/>
+            <a:ext cx="10846357" cy="5639090"/>
           </a:xfrm>
           <a:prstGeom prst="rect">
             <a:avLst/>
@@ -5109,7 +4171,7 @@
     </p:spTree>
     <p:extLst>
       <p:ext uri="{BB962C8B-B14F-4D97-AF65-F5344CB8AC3E}">
-        <p14:creationId xmlns:p14="http://schemas.microsoft.com/office/powerpoint/2010/main" val="4150860947"/>
+        <p14:creationId xmlns:p14="http://schemas.microsoft.com/office/powerpoint/2010/main" val="2230959479"/>
       </p:ext>
     </p:extLst>
   </p:cSld>
@@ -5127,7 +4189,7 @@
         <p:cNvPr id="1" name="">
           <a:extLst>
             <a:ext uri="{FF2B5EF4-FFF2-40B4-BE49-F238E27FC236}">
-              <a16:creationId xmlns:a16="http://schemas.microsoft.com/office/drawing/2014/main" id="{DA2443F4-D0BD-4DB2-57F4-0CCBDCCCCED0}"/>
+              <a16:creationId xmlns:a16="http://schemas.microsoft.com/office/drawing/2014/main" id="{B243C1B2-6892-680D-3BDF-96314713C640}"/>
             </a:ext>
           </a:extLst>
         </p:cNvPr>
@@ -5147,7 +4209,7 @@
           <p:cNvPr id="2" name="제목 1">
             <a:extLst>
               <a:ext uri="{FF2B5EF4-FFF2-40B4-BE49-F238E27FC236}">
-                <a16:creationId xmlns:a16="http://schemas.microsoft.com/office/drawing/2014/main" id="{B11B85F9-964A-3291-6376-963A2692BAE4}"/>
+                <a16:creationId xmlns:a16="http://schemas.microsoft.com/office/drawing/2014/main" id="{9F2AA772-3ED0-89B6-6F4E-C72697E7C851}"/>
               </a:ext>
             </a:extLst>
           </p:cNvPr>
@@ -5161,7 +4223,7 @@
         <p:spPr>
           <a:xfrm>
             <a:off x="171450" y="200025"/>
-            <a:ext cx="10515600" cy="1325563"/>
+            <a:ext cx="11576050" cy="1325563"/>
           </a:xfrm>
         </p:spPr>
         <p:txBody>
@@ -5172,7 +4234,7 @@
           <a:p>
             <a:r>
               <a:rPr lang="en-US" altLang="ko-KR" b="1" dirty="0"/>
-              <a:t>5. Linearization Validation</a:t>
+              <a:t>1. Motor Linearization</a:t>
             </a:r>
             <a:br>
               <a:rPr lang="ko-KR" altLang="ko-KR" b="1" dirty="0"/>
@@ -5181,205 +4243,12 @@
           </a:p>
         </p:txBody>
       </p:sp>
-      <mc:AlternateContent xmlns:mc="http://schemas.openxmlformats.org/markup-compatibility/2006" xmlns:a14="http://schemas.microsoft.com/office/drawing/2010/main">
-        <mc:Choice Requires="a14">
-          <p:sp>
-            <p:nvSpPr>
-              <p:cNvPr id="4" name="내용 개체 틀 3">
-                <a:extLst>
-                  <a:ext uri="{FF2B5EF4-FFF2-40B4-BE49-F238E27FC236}">
-                    <a16:creationId xmlns:a16="http://schemas.microsoft.com/office/drawing/2014/main" id="{BF463741-A5C5-004E-7D5C-9B4CB12E78AC}"/>
-                  </a:ext>
-                </a:extLst>
-              </p:cNvPr>
-              <p:cNvSpPr>
-                <a:spLocks noGrp="1"/>
-              </p:cNvSpPr>
-              <p:nvPr>
-                <p:ph idx="1"/>
-              </p:nvPr>
-            </p:nvSpPr>
-            <p:spPr>
-              <a:xfrm>
-                <a:off x="444500" y="1253331"/>
-                <a:ext cx="6131398" cy="4351338"/>
-              </a:xfrm>
-            </p:spPr>
-            <p:txBody>
-              <a:bodyPr>
-                <a:normAutofit lnSpcReduction="10000"/>
-              </a:bodyPr>
-              <a:lstStyle/>
-              <a:p>
-                <a:pPr marL="514350" indent="-514350">
-                  <a:buFont typeface="+mj-lt"/>
-                  <a:buAutoNum type="arabicParenR"/>
-                </a:pPr>
-                <a:r>
-                  <a:rPr lang="en-US" altLang="ko-KR" b="1" dirty="0">
-                    <a:solidFill>
-                      <a:schemeClr val="tx2">
-                        <a:lumMod val="90000"/>
-                        <a:lumOff val="10000"/>
-                      </a:schemeClr>
-                    </a:solidFill>
-                  </a:rPr>
-                  <a:t>Deadzone: </a:t>
-                </a:r>
-                <a:r>
-                  <a:rPr lang="en-US" altLang="ko-KR" dirty="0" err="1"/>
-                  <a:t>Deadzone</a:t>
-                </a:r>
-                <a:r>
-                  <a:rPr lang="en-US" altLang="ko-KR" dirty="0"/>
-                  <a:t> was observed around the control input </a:t>
-                </a:r>
-                <a14:m>
-                  <m:oMath xmlns:m="http://schemas.openxmlformats.org/officeDocument/2006/math">
-                    <m:r>
-                      <a:rPr lang="en-US" altLang="ko-KR" b="0" i="0" dirty="0" smtClean="0">
-                        <a:latin typeface="Cambria Math" panose="02040503050406030204" pitchFamily="18" charset="0"/>
-                      </a:rPr>
-                      <m:t>(</m:t>
-                    </m:r>
-                    <m:sSub>
-                      <m:sSubPr>
-                        <m:ctrlPr>
-                          <a:rPr lang="en-US" altLang="ko-KR" i="1" dirty="0">
-                            <a:latin typeface="Cambria Math" panose="02040503050406030204" pitchFamily="18" charset="0"/>
-                          </a:rPr>
-                        </m:ctrlPr>
-                      </m:sSubPr>
-                      <m:e>
-                        <m:r>
-                          <a:rPr lang="en-US" altLang="ko-KR" b="0" i="1" dirty="0">
-                            <a:latin typeface="Cambria Math" panose="02040503050406030204" pitchFamily="18" charset="0"/>
-                          </a:rPr>
-                          <m:t>𝑉</m:t>
-                        </m:r>
-                      </m:e>
-                      <m:sub>
-                        <m:r>
-                          <a:rPr lang="en-US" altLang="ko-KR" b="0" i="1" dirty="0">
-                            <a:latin typeface="Cambria Math" panose="02040503050406030204" pitchFamily="18" charset="0"/>
-                          </a:rPr>
-                          <m:t>𝑐𝑚𝑑</m:t>
-                        </m:r>
-                      </m:sub>
-                    </m:sSub>
-                    <m:r>
-                      <a:rPr lang="en-US" altLang="ko-KR" b="0" i="1" dirty="0">
-                        <a:latin typeface="Cambria Math" panose="02040503050406030204" pitchFamily="18" charset="0"/>
-                      </a:rPr>
-                      <m:t> </m:t>
-                    </m:r>
-                    <m:r>
-                      <a:rPr lang="en-US" altLang="ko-KR" b="0" i="1" dirty="0" smtClean="0">
-                        <a:latin typeface="Cambria Math" panose="02040503050406030204" pitchFamily="18" charset="0"/>
-                      </a:rPr>
-                      <m:t>)</m:t>
-                    </m:r>
-                  </m:oMath>
-                </a14:m>
-                <a:r>
-                  <a:rPr lang="en-US" altLang="ko-KR" dirty="0"/>
-                  <a:t> range of -0.05 V to +0.05 V.</a:t>
-                </a:r>
-              </a:p>
-              <a:p>
-                <a:pPr marL="514350" indent="-514350">
-                  <a:buFont typeface="+mj-lt"/>
-                  <a:buAutoNum type="arabicParenR"/>
-                </a:pPr>
-                <a:endParaRPr lang="en-US" altLang="ko-KR" b="1" dirty="0"/>
-              </a:p>
-              <a:p>
-                <a:pPr marL="514350" indent="-514350">
-                  <a:buFont typeface="+mj-lt"/>
-                  <a:buAutoNum type="arabicParenR"/>
-                </a:pPr>
-                <a:r>
-                  <a:rPr lang="en-US" altLang="ko-KR" b="1" dirty="0">
-                    <a:solidFill>
-                      <a:schemeClr val="tx2">
-                        <a:lumMod val="90000"/>
-                        <a:lumOff val="10000"/>
-                      </a:schemeClr>
-                    </a:solidFill>
-                  </a:rPr>
-                  <a:t>Minimum Peak Distortion: </a:t>
-                </a:r>
-                <a:r>
-                  <a:rPr lang="en-US" altLang="ko-KR" dirty="0"/>
-                  <a:t>Distortion occurred in the response curve passed through its minimum peak due to the </a:t>
-                </a:r>
-                <a:r>
-                  <a:rPr lang="en-US" altLang="ko-KR" b="1" dirty="0">
-                    <a:solidFill>
-                      <a:srgbClr val="600000"/>
-                    </a:solidFill>
-                  </a:rPr>
-                  <a:t>impact of mechanical backlash</a:t>
-                </a:r>
-                <a:r>
-                  <a:rPr lang="en-US" altLang="ko-KR" dirty="0"/>
-                  <a:t> during the directional reversal.</a:t>
-                </a:r>
-                <a:endParaRPr lang="ko-KR" altLang="en-US" dirty="0"/>
-              </a:p>
-            </p:txBody>
-          </p:sp>
-        </mc:Choice>
-        <mc:Fallback xmlns="">
-          <p:sp>
-            <p:nvSpPr>
-              <p:cNvPr id="4" name="내용 개체 틀 3">
-                <a:extLst>
-                  <a:ext uri="{FF2B5EF4-FFF2-40B4-BE49-F238E27FC236}">
-                    <a16:creationId xmlns:a16="http://schemas.microsoft.com/office/drawing/2014/main" id="{BF463741-A5C5-004E-7D5C-9B4CB12E78AC}"/>
-                  </a:ext>
-                </a:extLst>
-              </p:cNvPr>
-              <p:cNvSpPr>
-                <a:spLocks noGrp="1" noRot="1" noChangeAspect="1" noMove="1" noResize="1" noEditPoints="1" noAdjustHandles="1" noChangeArrowheads="1" noChangeShapeType="1" noTextEdit="1"/>
-              </p:cNvSpPr>
-              <p:nvPr>
-                <p:ph idx="1"/>
-              </p:nvPr>
-            </p:nvSpPr>
-            <p:spPr>
-              <a:xfrm>
-                <a:off x="444500" y="1253331"/>
-                <a:ext cx="6131398" cy="4351338"/>
-              </a:xfrm>
-              <a:blipFill>
-                <a:blip r:embed="rId2"/>
-                <a:stretch>
-                  <a:fillRect l="-2386" t="-4628" r="-1889"/>
-                </a:stretch>
-              </a:blipFill>
-            </p:spPr>
-            <p:txBody>
-              <a:bodyPr/>
-              <a:lstStyle/>
-              <a:p>
-                <a:r>
-                  <a:rPr lang="ko-KR" altLang="en-US">
-                    <a:noFill/>
-                  </a:rPr>
-                  <a:t> </a:t>
-                </a:r>
-              </a:p>
-            </p:txBody>
-          </p:sp>
-        </mc:Fallback>
-      </mc:AlternateContent>
       <p:sp>
         <p:nvSpPr>
           <p:cNvPr id="3" name="직사각형 2">
             <a:extLst>
               <a:ext uri="{FF2B5EF4-FFF2-40B4-BE49-F238E27FC236}">
-                <a16:creationId xmlns:a16="http://schemas.microsoft.com/office/drawing/2014/main" id="{D5F93742-79D4-C3B9-B18D-2834CE0F1A10}"/>
+                <a16:creationId xmlns:a16="http://schemas.microsoft.com/office/drawing/2014/main" id="{D81BE15A-2601-52A5-03CA-587238FC6C29}"/>
               </a:ext>
             </a:extLst>
           </p:cNvPr>
@@ -5436,10 +4305,10 @@
       </p:sp>
       <p:pic>
         <p:nvPicPr>
-          <p:cNvPr id="6" name="그림 5">
-            <a:extLst>
-              <a:ext uri="{FF2B5EF4-FFF2-40B4-BE49-F238E27FC236}">
-                <a16:creationId xmlns:a16="http://schemas.microsoft.com/office/drawing/2014/main" id="{B73E7A65-8227-B677-458B-993BA0DB9DB0}"/>
+          <p:cNvPr id="8" name="그림 7">
+            <a:extLst>
+              <a:ext uri="{FF2B5EF4-FFF2-40B4-BE49-F238E27FC236}">
+                <a16:creationId xmlns:a16="http://schemas.microsoft.com/office/drawing/2014/main" id="{438475D1-789D-A458-0685-238B55EFF6FE}"/>
               </a:ext>
             </a:extLst>
           </p:cNvPr>
@@ -5449,105 +4318,15 @@
           <p:nvPr/>
         </p:nvPicPr>
         <p:blipFill>
-          <a:blip r:embed="rId3"/>
+          <a:blip r:embed="rId2"/>
           <a:stretch>
             <a:fillRect/>
           </a:stretch>
         </p:blipFill>
         <p:spPr>
           <a:xfrm>
-            <a:off x="6655743" y="1164900"/>
-            <a:ext cx="4986498" cy="2587901"/>
-          </a:xfrm>
-          <a:prstGeom prst="rect">
-            <a:avLst/>
-          </a:prstGeom>
-        </p:spPr>
-      </p:pic>
-      <p:pic>
-        <p:nvPicPr>
-          <p:cNvPr id="7" name="그림 6">
-            <a:extLst>
-              <a:ext uri="{FF2B5EF4-FFF2-40B4-BE49-F238E27FC236}">
-                <a16:creationId xmlns:a16="http://schemas.microsoft.com/office/drawing/2014/main" id="{13FA7AC0-AD4B-AFB4-24B1-8323EC875DEE}"/>
-              </a:ext>
-            </a:extLst>
-          </p:cNvPr>
-          <p:cNvPicPr>
-            <a:picLocks noChangeAspect="1"/>
-          </p:cNvPicPr>
-          <p:nvPr/>
-        </p:nvPicPr>
-        <p:blipFill>
-          <a:blip r:embed="rId4"/>
-          <a:stretch>
-            <a:fillRect/>
-          </a:stretch>
-        </p:blipFill>
-        <p:spPr>
-          <a:xfrm>
-            <a:off x="6655742" y="3939417"/>
-            <a:ext cx="5091757" cy="2642529"/>
-          </a:xfrm>
-          <a:prstGeom prst="rect">
-            <a:avLst/>
-          </a:prstGeom>
-        </p:spPr>
-      </p:pic>
-      <p:pic>
-        <p:nvPicPr>
-          <p:cNvPr id="10" name="그림 9">
-            <a:extLst>
-              <a:ext uri="{FF2B5EF4-FFF2-40B4-BE49-F238E27FC236}">
-                <a16:creationId xmlns:a16="http://schemas.microsoft.com/office/drawing/2014/main" id="{DC8E4FCC-17F8-3EAF-4420-6F5C8565B861}"/>
-              </a:ext>
-            </a:extLst>
-          </p:cNvPr>
-          <p:cNvPicPr>
-            <a:picLocks noChangeAspect="1"/>
-          </p:cNvPicPr>
-          <p:nvPr/>
-        </p:nvPicPr>
-        <p:blipFill>
-          <a:blip r:embed="rId5"/>
-          <a:stretch>
-            <a:fillRect/>
-          </a:stretch>
-        </p:blipFill>
-        <p:spPr>
-          <a:xfrm>
-            <a:off x="6422268" y="1074341"/>
-            <a:ext cx="5219973" cy="2769018"/>
-          </a:xfrm>
-          <a:prstGeom prst="rect">
-            <a:avLst/>
-          </a:prstGeom>
-        </p:spPr>
-      </p:pic>
-      <p:pic>
-        <p:nvPicPr>
-          <p:cNvPr id="14" name="그림 13">
-            <a:extLst>
-              <a:ext uri="{FF2B5EF4-FFF2-40B4-BE49-F238E27FC236}">
-                <a16:creationId xmlns:a16="http://schemas.microsoft.com/office/drawing/2014/main" id="{3CF15378-BE9A-D172-2939-41268F7EDE46}"/>
-              </a:ext>
-            </a:extLst>
-          </p:cNvPr>
-          <p:cNvPicPr>
-            <a:picLocks noChangeAspect="1"/>
-          </p:cNvPicPr>
-          <p:nvPr/>
-        </p:nvPicPr>
-        <p:blipFill>
-          <a:blip r:embed="rId6"/>
-          <a:stretch>
-            <a:fillRect/>
-          </a:stretch>
-        </p:blipFill>
-        <p:spPr>
-          <a:xfrm>
-            <a:off x="6575898" y="3843359"/>
-            <a:ext cx="5219973" cy="2769018"/>
+            <a:off x="1109183" y="1320510"/>
+            <a:ext cx="9973634" cy="5185356"/>
           </a:xfrm>
           <a:prstGeom prst="rect">
             <a:avLst/>
@@ -5557,7 +4336,7 @@
     </p:spTree>
     <p:extLst>
       <p:ext uri="{BB962C8B-B14F-4D97-AF65-F5344CB8AC3E}">
-        <p14:creationId xmlns:p14="http://schemas.microsoft.com/office/powerpoint/2010/main" val="1602205156"/>
+        <p14:creationId xmlns:p14="http://schemas.microsoft.com/office/powerpoint/2010/main" val="784795021"/>
       </p:ext>
     </p:extLst>
   </p:cSld>
@@ -5575,7 +4354,7 @@
         <p:cNvPr id="1" name="">
           <a:extLst>
             <a:ext uri="{FF2B5EF4-FFF2-40B4-BE49-F238E27FC236}">
-              <a16:creationId xmlns:a16="http://schemas.microsoft.com/office/drawing/2014/main" id="{CAB89717-E2B2-73B1-6A86-F842C5FE1BFF}"/>
+              <a16:creationId xmlns:a16="http://schemas.microsoft.com/office/drawing/2014/main" id="{59C3F069-58E5-E51F-6C55-417C3742ACEF}"/>
             </a:ext>
           </a:extLst>
         </p:cNvPr>
@@ -5595,7 +4374,7 @@
           <p:cNvPr id="2" name="제목 1">
             <a:extLst>
               <a:ext uri="{FF2B5EF4-FFF2-40B4-BE49-F238E27FC236}">
-                <a16:creationId xmlns:a16="http://schemas.microsoft.com/office/drawing/2014/main" id="{8953AC5E-D635-23A0-7DB0-70828607C90B}"/>
+                <a16:creationId xmlns:a16="http://schemas.microsoft.com/office/drawing/2014/main" id="{BDFDB4F3-EC87-5D96-52E5-CF3D11BB6F75}"/>
               </a:ext>
             </a:extLst>
           </p:cNvPr>
@@ -5609,7 +4388,7 @@
         <p:spPr>
           <a:xfrm>
             <a:off x="171450" y="200025"/>
-            <a:ext cx="10515600" cy="1325563"/>
+            <a:ext cx="11576050" cy="1325563"/>
           </a:xfrm>
         </p:spPr>
         <p:txBody>
@@ -5620,7 +4399,11 @@
           <a:p>
             <a:r>
               <a:rPr lang="en-US" altLang="ko-KR" b="1" dirty="0"/>
-              <a:t>6. Check Slew Rate Limit</a:t>
+              <a:t>2. Motor Modeling – </a:t>
+            </a:r>
+            <a:r>
+              <a:rPr lang="ko-KR" altLang="en-US" b="1" dirty="0"/>
+              <a:t>나중에 추가</a:t>
             </a:r>
             <a:br>
               <a:rPr lang="ko-KR" altLang="ko-KR" b="1" dirty="0"/>
@@ -5631,98 +4414,10 @@
       </p:sp>
       <p:sp>
         <p:nvSpPr>
-          <p:cNvPr id="4" name="내용 개체 틀 3">
-            <a:extLst>
-              <a:ext uri="{FF2B5EF4-FFF2-40B4-BE49-F238E27FC236}">
-                <a16:creationId xmlns:a16="http://schemas.microsoft.com/office/drawing/2014/main" id="{298190D6-6DAF-A982-30F5-51EDBFE6E70B}"/>
-              </a:ext>
-            </a:extLst>
-          </p:cNvPr>
-          <p:cNvSpPr>
-            <a:spLocks noGrp="1"/>
-          </p:cNvSpPr>
-          <p:nvPr>
-            <p:ph idx="1"/>
-          </p:nvPr>
-        </p:nvSpPr>
-        <p:spPr>
-          <a:xfrm>
-            <a:off x="444500" y="1253331"/>
-            <a:ext cx="6096000" cy="4351338"/>
-          </a:xfrm>
-        </p:spPr>
-        <p:txBody>
-          <a:bodyPr>
-            <a:normAutofit fontScale="92500" lnSpcReduction="10000"/>
-          </a:bodyPr>
-          <a:lstStyle/>
-          <a:p>
-            <a:pPr marL="514350" indent="-514350">
-              <a:lnSpc>
-                <a:spcPct val="100000"/>
-              </a:lnSpc>
-              <a:buFont typeface="+mj-lt"/>
-              <a:buAutoNum type="arabicParenR"/>
-            </a:pPr>
-            <a:r>
-              <a:rPr lang="en-US" altLang="ko-KR" b="1" dirty="0">
-                <a:solidFill>
-                  <a:schemeClr val="tx2">
-                    <a:lumMod val="90000"/>
-                    <a:lumOff val="10000"/>
-                  </a:schemeClr>
-                </a:solidFill>
-              </a:rPr>
-              <a:t>Response Linearity: </a:t>
-            </a:r>
-            <a:r>
-              <a:rPr lang="en-US" altLang="ko-KR" dirty="0"/>
-              <a:t>The transient slope of the output increased linearly in proportion to the pulse input magnitude from 0V up to 1.8V.</a:t>
-            </a:r>
-          </a:p>
-          <a:p>
-            <a:pPr marL="514350" indent="-514350">
-              <a:lnSpc>
-                <a:spcPct val="100000"/>
-              </a:lnSpc>
-              <a:buFont typeface="+mj-lt"/>
-              <a:buAutoNum type="arabicParenR"/>
-            </a:pPr>
-            <a:endParaRPr lang="en-US" altLang="ko-KR" dirty="0"/>
-          </a:p>
-          <a:p>
-            <a:pPr marL="514350" indent="-514350">
-              <a:lnSpc>
-                <a:spcPct val="100000"/>
-              </a:lnSpc>
-              <a:buFont typeface="+mj-lt"/>
-              <a:buAutoNum type="arabicParenR"/>
-            </a:pPr>
-            <a:r>
-              <a:rPr lang="en-US" altLang="ko-KR" b="1" dirty="0">
-                <a:solidFill>
-                  <a:schemeClr val="tx2">
-                    <a:lumMod val="90000"/>
-                    <a:lumOff val="10000"/>
-                  </a:schemeClr>
-                </a:solidFill>
-              </a:rPr>
-              <a:t>Limit Verification: </a:t>
-            </a:r>
-            <a:r>
-              <a:rPr lang="en-US" altLang="ko-KR" dirty="0"/>
-              <a:t>The lack of slope saturation confirms that the system is not affected by slew rate limits within the tested operational range.</a:t>
-            </a:r>
-            <a:endParaRPr lang="ko-KR" altLang="en-US" dirty="0"/>
-          </a:p>
-        </p:txBody>
-      </p:sp>
-      <p:sp>
-        <p:nvSpPr>
           <p:cNvPr id="3" name="직사각형 2">
             <a:extLst>
               <a:ext uri="{FF2B5EF4-FFF2-40B4-BE49-F238E27FC236}">
-                <a16:creationId xmlns:a16="http://schemas.microsoft.com/office/drawing/2014/main" id="{92708E0D-8531-BA72-A9E5-E0A25EA363C0}"/>
+                <a16:creationId xmlns:a16="http://schemas.microsoft.com/office/drawing/2014/main" id="{ADD21F72-2671-FF91-DE9B-A1416F669F64}"/>
               </a:ext>
             </a:extLst>
           </p:cNvPr>
@@ -5779,10 +4474,10 @@
       </p:sp>
       <p:pic>
         <p:nvPicPr>
-          <p:cNvPr id="6" name="그림 5">
-            <a:extLst>
-              <a:ext uri="{FF2B5EF4-FFF2-40B4-BE49-F238E27FC236}">
-                <a16:creationId xmlns:a16="http://schemas.microsoft.com/office/drawing/2014/main" id="{E32B69DC-05B4-6DEB-C0D9-452345606061}"/>
+          <p:cNvPr id="5" name="그림 4">
+            <a:extLst>
+              <a:ext uri="{FF2B5EF4-FFF2-40B4-BE49-F238E27FC236}">
+                <a16:creationId xmlns:a16="http://schemas.microsoft.com/office/drawing/2014/main" id="{CAD47320-C152-9B5C-AD46-D191C1A6570D}"/>
               </a:ext>
             </a:extLst>
           </p:cNvPr>
@@ -5799,98 +4494,8 @@
         </p:blipFill>
         <p:spPr>
           <a:xfrm>
-            <a:off x="6655743" y="1164900"/>
-            <a:ext cx="4986498" cy="2587901"/>
-          </a:xfrm>
-          <a:prstGeom prst="rect">
-            <a:avLst/>
-          </a:prstGeom>
-        </p:spPr>
-      </p:pic>
-      <p:pic>
-        <p:nvPicPr>
-          <p:cNvPr id="7" name="그림 6">
-            <a:extLst>
-              <a:ext uri="{FF2B5EF4-FFF2-40B4-BE49-F238E27FC236}">
-                <a16:creationId xmlns:a16="http://schemas.microsoft.com/office/drawing/2014/main" id="{F13AAAC0-0000-A9FF-307D-6486CEE074DC}"/>
-              </a:ext>
-            </a:extLst>
-          </p:cNvPr>
-          <p:cNvPicPr>
-            <a:picLocks noChangeAspect="1"/>
-          </p:cNvPicPr>
-          <p:nvPr/>
-        </p:nvPicPr>
-        <p:blipFill>
-          <a:blip r:embed="rId3"/>
-          <a:stretch>
-            <a:fillRect/>
-          </a:stretch>
-        </p:blipFill>
-        <p:spPr>
-          <a:xfrm>
-            <a:off x="6655742" y="3939417"/>
-            <a:ext cx="5091757" cy="2642529"/>
-          </a:xfrm>
-          <a:prstGeom prst="rect">
-            <a:avLst/>
-          </a:prstGeom>
-        </p:spPr>
-      </p:pic>
-      <p:pic>
-        <p:nvPicPr>
-          <p:cNvPr id="5" name="그림 4">
-            <a:extLst>
-              <a:ext uri="{FF2B5EF4-FFF2-40B4-BE49-F238E27FC236}">
-                <a16:creationId xmlns:a16="http://schemas.microsoft.com/office/drawing/2014/main" id="{81F0226D-E842-573F-9A13-73B12E8BA9FD}"/>
-              </a:ext>
-            </a:extLst>
-          </p:cNvPr>
-          <p:cNvPicPr>
-            <a:picLocks noChangeAspect="1"/>
-          </p:cNvPicPr>
-          <p:nvPr/>
-        </p:nvPicPr>
-        <p:blipFill>
-          <a:blip r:embed="rId4"/>
-          <a:stretch>
-            <a:fillRect/>
-          </a:stretch>
-        </p:blipFill>
-        <p:spPr>
-          <a:xfrm>
-            <a:off x="6655741" y="1138039"/>
-            <a:ext cx="5038255" cy="2614762"/>
-          </a:xfrm>
-          <a:prstGeom prst="rect">
-            <a:avLst/>
-          </a:prstGeom>
-        </p:spPr>
-      </p:pic>
-      <p:pic>
-        <p:nvPicPr>
-          <p:cNvPr id="10" name="그림 9">
-            <a:extLst>
-              <a:ext uri="{FF2B5EF4-FFF2-40B4-BE49-F238E27FC236}">
-                <a16:creationId xmlns:a16="http://schemas.microsoft.com/office/drawing/2014/main" id="{5B22197B-678B-DF75-F1B2-E65BB0D0CF57}"/>
-              </a:ext>
-            </a:extLst>
-          </p:cNvPr>
-          <p:cNvPicPr>
-            <a:picLocks noChangeAspect="1"/>
-          </p:cNvPicPr>
-          <p:nvPr/>
-        </p:nvPicPr>
-        <p:blipFill>
-          <a:blip r:embed="rId5"/>
-          <a:stretch>
-            <a:fillRect/>
-          </a:stretch>
-        </p:blipFill>
-        <p:spPr>
-          <a:xfrm>
-            <a:off x="6655740" y="3939416"/>
-            <a:ext cx="5091757" cy="2642529"/>
+            <a:off x="1169851" y="1191750"/>
+            <a:ext cx="9689840" cy="5126500"/>
           </a:xfrm>
           <a:prstGeom prst="rect">
             <a:avLst/>
@@ -5900,7 +4505,7 @@
     </p:spTree>
     <p:extLst>
       <p:ext uri="{BB962C8B-B14F-4D97-AF65-F5344CB8AC3E}">
-        <p14:creationId xmlns:p14="http://schemas.microsoft.com/office/powerpoint/2010/main" val="396243502"/>
+        <p14:creationId xmlns:p14="http://schemas.microsoft.com/office/powerpoint/2010/main" val="2588961558"/>
       </p:ext>
     </p:extLst>
   </p:cSld>
@@ -5918,7 +4523,7 @@
         <p:cNvPr id="1" name="">
           <a:extLst>
             <a:ext uri="{FF2B5EF4-FFF2-40B4-BE49-F238E27FC236}">
-              <a16:creationId xmlns:a16="http://schemas.microsoft.com/office/drawing/2014/main" id="{4C334EBC-2F90-DF0D-DA99-392A85B8D983}"/>
+              <a16:creationId xmlns:a16="http://schemas.microsoft.com/office/drawing/2014/main" id="{95810702-C660-9F39-1CCF-12371AEFA7EF}"/>
             </a:ext>
           </a:extLst>
         </p:cNvPr>
@@ -5938,7 +4543,7 @@
           <p:cNvPr id="2" name="제목 1">
             <a:extLst>
               <a:ext uri="{FF2B5EF4-FFF2-40B4-BE49-F238E27FC236}">
-                <a16:creationId xmlns:a16="http://schemas.microsoft.com/office/drawing/2014/main" id="{5E62FF18-B864-6317-F2D1-E0FF240FD854}"/>
+                <a16:creationId xmlns:a16="http://schemas.microsoft.com/office/drawing/2014/main" id="{D9D53ECB-3C71-674B-6F1D-D9BDD630D1D3}"/>
               </a:ext>
             </a:extLst>
           </p:cNvPr>
@@ -5952,18 +4557,18 @@
         <p:spPr>
           <a:xfrm>
             <a:off x="171450" y="200025"/>
-            <a:ext cx="10515600" cy="1325563"/>
+            <a:ext cx="11576050" cy="1325563"/>
           </a:xfrm>
         </p:spPr>
         <p:txBody>
           <a:bodyPr>
-            <a:normAutofit fontScale="90000"/>
+            <a:normAutofit/>
           </a:bodyPr>
           <a:lstStyle/>
           <a:p>
             <a:r>
               <a:rPr lang="en-US" altLang="ko-KR" b="1" dirty="0"/>
-              <a:t>7. Sine Response - Bode Magnitude plot</a:t>
+              <a:t>3. Designation</a:t>
             </a:r>
             <a:br>
               <a:rPr lang="ko-KR" altLang="ko-KR" b="1" dirty="0"/>
@@ -5974,141 +4579,10 @@
       </p:sp>
       <p:sp>
         <p:nvSpPr>
-          <p:cNvPr id="4" name="내용 개체 틀 3">
-            <a:extLst>
-              <a:ext uri="{FF2B5EF4-FFF2-40B4-BE49-F238E27FC236}">
-                <a16:creationId xmlns:a16="http://schemas.microsoft.com/office/drawing/2014/main" id="{E069C79D-6981-290C-E0EA-39A54F563789}"/>
-              </a:ext>
-            </a:extLst>
-          </p:cNvPr>
-          <p:cNvSpPr>
-            <a:spLocks noGrp="1"/>
-          </p:cNvSpPr>
-          <p:nvPr>
-            <p:ph idx="1"/>
-          </p:nvPr>
-        </p:nvSpPr>
-        <p:spPr>
-          <a:xfrm>
-            <a:off x="444500" y="1253331"/>
-            <a:ext cx="6280150" cy="4351338"/>
-          </a:xfrm>
-        </p:spPr>
-        <p:txBody>
-          <a:bodyPr>
-            <a:normAutofit lnSpcReduction="10000"/>
-          </a:bodyPr>
-          <a:lstStyle/>
-          <a:p>
-            <a:pPr marL="514350" indent="-514350">
-              <a:lnSpc>
-                <a:spcPct val="100000"/>
-              </a:lnSpc>
-              <a:buFont typeface="+mj-lt"/>
-              <a:buAutoNum type="arabicParenR"/>
-            </a:pPr>
-            <a:r>
-              <a:rPr lang="en-US" altLang="ko-KR" b="1" dirty="0">
-                <a:solidFill>
-                  <a:schemeClr val="tx2">
-                    <a:lumMod val="90000"/>
-                    <a:lumOff val="10000"/>
-                  </a:schemeClr>
-                </a:solidFill>
-              </a:rPr>
-              <a:t>Sine Wave Input:</a:t>
-            </a:r>
-            <a:r>
-              <a:rPr lang="en-US" altLang="ko-KR" dirty="0">
-                <a:solidFill>
-                  <a:schemeClr val="tx2">
-                    <a:lumMod val="90000"/>
-                    <a:lumOff val="10000"/>
-                  </a:schemeClr>
-                </a:solidFill>
-              </a:rPr>
-              <a:t> </a:t>
-            </a:r>
-            <a:r>
-              <a:rPr lang="en-US" altLang="ko-KR" dirty="0"/>
-              <a:t>Evaluated the frequency response by sequentially applying sine wave inputs from </a:t>
-            </a:r>
-            <a:r>
-              <a:rPr lang="en-US" altLang="ko-KR" dirty="0">
-                <a:solidFill>
-                  <a:srgbClr val="600000"/>
-                </a:solidFill>
-              </a:rPr>
-              <a:t>DC to 8Hz.</a:t>
-            </a:r>
-          </a:p>
-          <a:p>
-            <a:pPr marL="514350" indent="-514350">
-              <a:lnSpc>
-                <a:spcPct val="100000"/>
-              </a:lnSpc>
-              <a:buFont typeface="+mj-lt"/>
-              <a:buAutoNum type="arabicParenR"/>
-            </a:pPr>
-            <a:endParaRPr lang="en-US" altLang="ko-KR" dirty="0"/>
-          </a:p>
-          <a:p>
-            <a:pPr marL="514350" indent="-514350">
-              <a:lnSpc>
-                <a:spcPct val="100000"/>
-              </a:lnSpc>
-              <a:buFont typeface="+mj-lt"/>
-              <a:buAutoNum type="arabicParenR"/>
-            </a:pPr>
-            <a:r>
-              <a:rPr lang="en-US" altLang="ko-KR" b="1" dirty="0">
-                <a:solidFill>
-                  <a:schemeClr val="tx2">
-                    <a:lumMod val="90000"/>
-                    <a:lumOff val="10000"/>
-                  </a:schemeClr>
-                </a:solidFill>
-              </a:rPr>
-              <a:t>Bandwidth Identification:</a:t>
-            </a:r>
-            <a:r>
-              <a:rPr lang="en-US" altLang="ko-KR" dirty="0"/>
-              <a:t> Determined the system bandwidth to be </a:t>
-            </a:r>
-            <a:r>
-              <a:rPr lang="en-US" altLang="ko-KR" dirty="0">
-                <a:solidFill>
-                  <a:srgbClr val="600000"/>
-                </a:solidFill>
-              </a:rPr>
-              <a:t>3.4Hz</a:t>
-            </a:r>
-            <a:r>
-              <a:rPr lang="en-US" altLang="ko-KR" dirty="0"/>
-              <a:t> by identifying the point where the gain drops to </a:t>
-            </a:r>
-            <a:r>
-              <a:rPr lang="en-US" altLang="ko-KR" dirty="0">
-                <a:solidFill>
-                  <a:srgbClr val="600000"/>
-                </a:solidFill>
-              </a:rPr>
-              <a:t>-3dB</a:t>
-            </a:r>
-            <a:r>
-              <a:rPr lang="en-US" altLang="ko-KR" dirty="0"/>
-              <a:t>.</a:t>
-            </a:r>
-            <a:endParaRPr lang="ko-KR" altLang="en-US" dirty="0"/>
-          </a:p>
-        </p:txBody>
-      </p:sp>
-      <p:sp>
-        <p:nvSpPr>
           <p:cNvPr id="3" name="직사각형 2">
             <a:extLst>
               <a:ext uri="{FF2B5EF4-FFF2-40B4-BE49-F238E27FC236}">
-                <a16:creationId xmlns:a16="http://schemas.microsoft.com/office/drawing/2014/main" id="{AA6AE231-0E57-9F4D-D7FB-F0359987E364}"/>
+                <a16:creationId xmlns:a16="http://schemas.microsoft.com/office/drawing/2014/main" id="{6F9851A4-B7B3-5FBC-B928-7B412C9B8DF4}"/>
               </a:ext>
             </a:extLst>
           </p:cNvPr>
@@ -6165,10 +4639,10 @@
       </p:sp>
       <p:pic>
         <p:nvPicPr>
-          <p:cNvPr id="6" name="그림 5">
-            <a:extLst>
-              <a:ext uri="{FF2B5EF4-FFF2-40B4-BE49-F238E27FC236}">
-                <a16:creationId xmlns:a16="http://schemas.microsoft.com/office/drawing/2014/main" id="{86F3E7D0-6E15-ACBD-AB2E-C746D86F39B3}"/>
+          <p:cNvPr id="5" name="그림 4">
+            <a:extLst>
+              <a:ext uri="{FF2B5EF4-FFF2-40B4-BE49-F238E27FC236}">
+                <a16:creationId xmlns:a16="http://schemas.microsoft.com/office/drawing/2014/main" id="{C9BC64B9-645E-690E-7F29-DCADFA07DD33}"/>
               </a:ext>
             </a:extLst>
           </p:cNvPr>
@@ -6185,158 +4659,8 @@
         </p:blipFill>
         <p:spPr>
           <a:xfrm>
-            <a:off x="6655743" y="1164900"/>
-            <a:ext cx="4986498" cy="2587901"/>
-          </a:xfrm>
-          <a:prstGeom prst="rect">
-            <a:avLst/>
-          </a:prstGeom>
-        </p:spPr>
-      </p:pic>
-      <p:pic>
-        <p:nvPicPr>
-          <p:cNvPr id="7" name="그림 6">
-            <a:extLst>
-              <a:ext uri="{FF2B5EF4-FFF2-40B4-BE49-F238E27FC236}">
-                <a16:creationId xmlns:a16="http://schemas.microsoft.com/office/drawing/2014/main" id="{17D5E7FA-4292-62E8-FE60-81FDC736E53E}"/>
-              </a:ext>
-            </a:extLst>
-          </p:cNvPr>
-          <p:cNvPicPr>
-            <a:picLocks noChangeAspect="1"/>
-          </p:cNvPicPr>
-          <p:nvPr/>
-        </p:nvPicPr>
-        <p:blipFill>
-          <a:blip r:embed="rId3"/>
-          <a:stretch>
-            <a:fillRect/>
-          </a:stretch>
-        </p:blipFill>
-        <p:spPr>
-          <a:xfrm>
-            <a:off x="6655742" y="3939417"/>
-            <a:ext cx="5091757" cy="2642529"/>
-          </a:xfrm>
-          <a:prstGeom prst="rect">
-            <a:avLst/>
-          </a:prstGeom>
-        </p:spPr>
-      </p:pic>
-      <p:pic>
-        <p:nvPicPr>
-          <p:cNvPr id="8" name="그림 7">
-            <a:extLst>
-              <a:ext uri="{FF2B5EF4-FFF2-40B4-BE49-F238E27FC236}">
-                <a16:creationId xmlns:a16="http://schemas.microsoft.com/office/drawing/2014/main" id="{DDA47ABE-6C32-8864-4FE7-F376661960F5}"/>
-              </a:ext>
-            </a:extLst>
-          </p:cNvPr>
-          <p:cNvPicPr>
-            <a:picLocks noChangeAspect="1"/>
-          </p:cNvPicPr>
-          <p:nvPr/>
-        </p:nvPicPr>
-        <p:blipFill>
-          <a:blip r:embed="rId4"/>
-          <a:stretch>
-            <a:fillRect/>
-          </a:stretch>
-        </p:blipFill>
-        <p:spPr>
-          <a:xfrm>
-            <a:off x="6655743" y="1164900"/>
-            <a:ext cx="4986498" cy="2587901"/>
-          </a:xfrm>
-          <a:prstGeom prst="rect">
-            <a:avLst/>
-          </a:prstGeom>
-        </p:spPr>
-      </p:pic>
-      <p:pic>
-        <p:nvPicPr>
-          <p:cNvPr id="9" name="그림 8">
-            <a:extLst>
-              <a:ext uri="{FF2B5EF4-FFF2-40B4-BE49-F238E27FC236}">
-                <a16:creationId xmlns:a16="http://schemas.microsoft.com/office/drawing/2014/main" id="{6B5FD3C2-4EB7-E328-C16C-133770FC7CBB}"/>
-              </a:ext>
-            </a:extLst>
-          </p:cNvPr>
-          <p:cNvPicPr>
-            <a:picLocks noChangeAspect="1"/>
-          </p:cNvPicPr>
-          <p:nvPr/>
-        </p:nvPicPr>
-        <p:blipFill>
-          <a:blip r:embed="rId5"/>
-          <a:stretch>
-            <a:fillRect/>
-          </a:stretch>
-        </p:blipFill>
-        <p:spPr>
-          <a:xfrm>
-            <a:off x="6655742" y="3939417"/>
-            <a:ext cx="5088063" cy="2642529"/>
-          </a:xfrm>
-          <a:prstGeom prst="rect">
-            <a:avLst/>
-          </a:prstGeom>
-        </p:spPr>
-      </p:pic>
-      <p:pic>
-        <p:nvPicPr>
-          <p:cNvPr id="5" name="그림 4">
-            <a:extLst>
-              <a:ext uri="{FF2B5EF4-FFF2-40B4-BE49-F238E27FC236}">
-                <a16:creationId xmlns:a16="http://schemas.microsoft.com/office/drawing/2014/main" id="{A7961066-7DF0-85A6-F12C-3EB985DC2B2A}"/>
-              </a:ext>
-            </a:extLst>
-          </p:cNvPr>
-          <p:cNvPicPr>
-            <a:picLocks noChangeAspect="1"/>
-          </p:cNvPicPr>
-          <p:nvPr/>
-        </p:nvPicPr>
-        <p:blipFill>
-          <a:blip r:embed="rId6"/>
-          <a:stretch>
-            <a:fillRect/>
-          </a:stretch>
-        </p:blipFill>
-        <p:spPr>
-          <a:xfrm>
-            <a:off x="6655742" y="1164900"/>
-            <a:ext cx="5034608" cy="2612869"/>
-          </a:xfrm>
-          <a:prstGeom prst="rect">
-            <a:avLst/>
-          </a:prstGeom>
-        </p:spPr>
-      </p:pic>
-      <p:pic>
-        <p:nvPicPr>
-          <p:cNvPr id="10" name="그림 9">
-            <a:extLst>
-              <a:ext uri="{FF2B5EF4-FFF2-40B4-BE49-F238E27FC236}">
-                <a16:creationId xmlns:a16="http://schemas.microsoft.com/office/drawing/2014/main" id="{87954F78-E466-7DB1-734C-3795C2825F8D}"/>
-              </a:ext>
-            </a:extLst>
-          </p:cNvPr>
-          <p:cNvPicPr>
-            <a:picLocks noChangeAspect="1"/>
-          </p:cNvPicPr>
-          <p:nvPr/>
-        </p:nvPicPr>
-        <p:blipFill>
-          <a:blip r:embed="rId7"/>
-          <a:stretch>
-            <a:fillRect/>
-          </a:stretch>
-        </p:blipFill>
-        <p:spPr>
-          <a:xfrm>
-            <a:off x="6643126" y="3939417"/>
-            <a:ext cx="5091757" cy="2642529"/>
+            <a:off x="1169851" y="1191750"/>
+            <a:ext cx="9689840" cy="5126500"/>
           </a:xfrm>
           <a:prstGeom prst="rect">
             <a:avLst/>
@@ -6346,7 +4670,7 @@
     </p:spTree>
     <p:extLst>
       <p:ext uri="{BB962C8B-B14F-4D97-AF65-F5344CB8AC3E}">
-        <p14:creationId xmlns:p14="http://schemas.microsoft.com/office/powerpoint/2010/main" val="2992843897"/>
+        <p14:creationId xmlns:p14="http://schemas.microsoft.com/office/powerpoint/2010/main" val="3989867635"/>
       </p:ext>
     </p:extLst>
   </p:cSld>

--- a/DCSP_FINAL_0610/ppt/DCSP_LAB3_ppt.pptx
+++ b/DCSP_FINAL_0610/ppt/DCSP_LAB3_ppt.pptx
@@ -4140,10 +4140,10 @@
       </p:sp>
       <p:pic>
         <p:nvPicPr>
-          <p:cNvPr id="10" name="그림 9">
-            <a:extLst>
-              <a:ext uri="{FF2B5EF4-FFF2-40B4-BE49-F238E27FC236}">
-                <a16:creationId xmlns:a16="http://schemas.microsoft.com/office/drawing/2014/main" id="{FB1C18F2-9067-A2AE-1E8E-1971905C50EF}"/>
+          <p:cNvPr id="5" name="그림 4">
+            <a:extLst>
+              <a:ext uri="{FF2B5EF4-FFF2-40B4-BE49-F238E27FC236}">
+                <a16:creationId xmlns:a16="http://schemas.microsoft.com/office/drawing/2014/main" id="{4F2E830B-5877-69B1-5FEE-FC39D21335F3}"/>
               </a:ext>
             </a:extLst>
           </p:cNvPr>
@@ -4160,14 +4160,168 @@
         </p:blipFill>
         <p:spPr>
           <a:xfrm>
-            <a:off x="536296" y="1218910"/>
-            <a:ext cx="10846357" cy="5639090"/>
+            <a:off x="3650971" y="1090852"/>
+            <a:ext cx="8096529" cy="4180995"/>
           </a:xfrm>
           <a:prstGeom prst="rect">
             <a:avLst/>
           </a:prstGeom>
         </p:spPr>
       </p:pic>
+      <p:sp>
+        <p:nvSpPr>
+          <p:cNvPr id="6" name="TextBox 5">
+            <a:extLst>
+              <a:ext uri="{FF2B5EF4-FFF2-40B4-BE49-F238E27FC236}">
+                <a16:creationId xmlns:a16="http://schemas.microsoft.com/office/drawing/2014/main" id="{298566CB-E511-5A4D-630A-B3FFCA76AA88}"/>
+              </a:ext>
+            </a:extLst>
+          </p:cNvPr>
+          <p:cNvSpPr txBox="1"/>
+          <p:nvPr/>
+        </p:nvSpPr>
+        <p:spPr>
+          <a:xfrm>
+            <a:off x="171449" y="1207078"/>
+            <a:ext cx="3574771" cy="1200329"/>
+          </a:xfrm>
+          <a:prstGeom prst="rect">
+            <a:avLst/>
+          </a:prstGeom>
+          <a:noFill/>
+        </p:spPr>
+        <p:txBody>
+          <a:bodyPr wrap="square" rtlCol="0">
+            <a:spAutoFit/>
+          </a:bodyPr>
+          <a:lstStyle/>
+          <a:p>
+            <a:pPr marL="342900" indent="-342900">
+              <a:buAutoNum type="arabicPeriod"/>
+            </a:pPr>
+            <a:r>
+              <a:rPr lang="ko-KR" altLang="en-US" dirty="0"/>
+              <a:t>기울기는 </a:t>
+            </a:r>
+            <a:r>
+              <a:rPr lang="en-US" altLang="ko-KR" dirty="0"/>
+              <a:t>input</a:t>
+            </a:r>
+            <a:r>
+              <a:rPr lang="ko-KR" altLang="en-US" dirty="0"/>
+              <a:t>과 거의 맞는다</a:t>
+            </a:r>
+            <a:r>
+              <a:rPr lang="en-US" altLang="ko-KR" dirty="0"/>
+              <a:t>.</a:t>
+            </a:r>
+          </a:p>
+          <a:p>
+            <a:pPr marL="342900" indent="-342900">
+              <a:buAutoNum type="arabicPeriod"/>
+            </a:pPr>
+            <a:r>
+              <a:rPr lang="en-US" altLang="ko-KR" dirty="0"/>
+              <a:t>1Hz</a:t>
+            </a:r>
+            <a:r>
+              <a:rPr lang="ko-KR" altLang="en-US" dirty="0"/>
+              <a:t>의 불필요한 </a:t>
+            </a:r>
+            <a:endParaRPr lang="en-US" altLang="ko-KR" dirty="0"/>
+          </a:p>
+          <a:p>
+            <a:pPr marL="342900" indent="-342900">
+              <a:buAutoNum type="arabicPeriod"/>
+            </a:pPr>
+            <a:endParaRPr lang="ko-KR" altLang="en-US" dirty="0"/>
+          </a:p>
+        </p:txBody>
+      </p:sp>
+      <p:pic>
+        <p:nvPicPr>
+          <p:cNvPr id="8" name="그림 7">
+            <a:extLst>
+              <a:ext uri="{FF2B5EF4-FFF2-40B4-BE49-F238E27FC236}">
+                <a16:creationId xmlns:a16="http://schemas.microsoft.com/office/drawing/2014/main" id="{FA03BA29-4888-2885-9110-3D8BD61BD778}"/>
+              </a:ext>
+            </a:extLst>
+          </p:cNvPr>
+          <p:cNvPicPr>
+            <a:picLocks noChangeAspect="1"/>
+          </p:cNvPicPr>
+          <p:nvPr/>
+        </p:nvPicPr>
+        <p:blipFill>
+          <a:blip r:embed="rId3"/>
+          <a:srcRect l="26197" t="16072" r="47773" b="49827"/>
+          <a:stretch>
+            <a:fillRect/>
+          </a:stretch>
+        </p:blipFill>
+        <p:spPr>
+          <a:xfrm>
+            <a:off x="5959475" y="1207078"/>
+            <a:ext cx="2015759" cy="1392220"/>
+          </a:xfrm>
+          <a:prstGeom prst="rect">
+            <a:avLst/>
+          </a:prstGeom>
+          <a:ln>
+            <a:solidFill>
+              <a:schemeClr val="accent2">
+                <a:lumMod val="75000"/>
+              </a:schemeClr>
+            </a:solidFill>
+          </a:ln>
+        </p:spPr>
+      </p:pic>
+      <p:cxnSp>
+        <p:nvCxnSpPr>
+          <p:cNvPr id="13" name="직선 화살표 연결선 12">
+            <a:extLst>
+              <a:ext uri="{FF2B5EF4-FFF2-40B4-BE49-F238E27FC236}">
+                <a16:creationId xmlns:a16="http://schemas.microsoft.com/office/drawing/2014/main" id="{E9004DF5-F9B4-D5AB-E8C2-9DCEB4BFA384}"/>
+              </a:ext>
+            </a:extLst>
+          </p:cNvPr>
+          <p:cNvCxnSpPr>
+            <a:cxnSpLocks/>
+          </p:cNvCxnSpPr>
+          <p:nvPr/>
+        </p:nvCxnSpPr>
+        <p:spPr>
+          <a:xfrm flipH="1">
+            <a:off x="5374993" y="1797050"/>
+            <a:ext cx="584482" cy="0"/>
+          </a:xfrm>
+          <a:prstGeom prst="straightConnector1">
+            <a:avLst/>
+          </a:prstGeom>
+          <a:ln w="57150">
+            <a:solidFill>
+              <a:schemeClr val="accent2">
+                <a:lumMod val="75000"/>
+              </a:schemeClr>
+            </a:solidFill>
+            <a:tailEnd type="triangle"/>
+          </a:ln>
+        </p:spPr>
+        <p:style>
+          <a:lnRef idx="2">
+            <a:schemeClr val="accent1"/>
+          </a:lnRef>
+          <a:fillRef idx="0">
+            <a:schemeClr val="accent1"/>
+          </a:fillRef>
+          <a:effectRef idx="1">
+            <a:schemeClr val="accent1"/>
+          </a:effectRef>
+          <a:fontRef idx="minor">
+            <a:schemeClr val="tx1"/>
+          </a:fontRef>
+        </p:style>
+      </p:cxnSp>
     </p:spTree>
     <p:extLst>
       <p:ext uri="{BB962C8B-B14F-4D97-AF65-F5344CB8AC3E}">
